--- a/Topic_A/Exam_Practice/AT-A-L01_Speaking_Workshop_Time_and_Daily_Routine.pptx
+++ b/Topic_A/Exam_Practice/AT-A-L01_Speaking_Workshop_Time_and_Daily_Routine.pptx
@@ -615,7 +615,11 @@
           <a:lstStyle/>
           <a:p>
             <a:r>
-              <a:rPr lang="en-US" dirty="0"/>
+              <a:rPr lang="ar-SA" dirty="0">
+                <a:latin typeface="Amiri" pitchFamily="2" charset="-78"/>
+                <a:ea typeface="Amiri" pitchFamily="2" charset="-78"/>
+                <a:cs typeface="Amiri" pitchFamily="2" charset="-78"/>
+              </a:rPr>
               <a:t>ROLE PLAY C (Develop) — at the sports club.
 SET-UP IN THE BREAKOUT ROOM: A = examiner (reads the left column ONLY — the questions, in order), B = candidate (sees the task column; Core may use the help column), C = observer (ticks the feedback checklist). 1 minute preparation, about 3 minutes speaking, 1 minute feedback, then rotate.
 Task ! is the unexpected question: in the exam the candidate has not seen it — the examiner should read it without warning.
@@ -707,7 +711,11 @@
           <a:lstStyle/>
           <a:p>
             <a:r>
-              <a:rPr lang="en-US" dirty="0"/>
+              <a:rPr lang="ar-SA" dirty="0">
+                <a:latin typeface="Amiri" pitchFamily="2" charset="-78"/>
+                <a:ea typeface="Amiri" pitchFamily="2" charset="-78"/>
+                <a:cs typeface="Amiri" pitchFamily="2" charset="-78"/>
+              </a:rPr>
               <a:t>ROLE PLAY D (Stretch) — an interview for the school radio.
 SET-UP IN THE BREAKOUT ROOM: A = examiner (reads the left column ONLY — the questions, in order), B = candidate (sees the task column; Core may use the help column), C = observer (ticks the feedback checklist). 1 minute preparation, about 3 minutes speaking, 1 minute feedback, then rotate.
 Task ! is the unexpected question: in the exam the candidate has not seen it — the examiner should read it without warning.
@@ -1243,7 +1251,11 @@
           <a:lstStyle/>
           <a:p>
             <a:r>
-              <a:rPr lang="en-US" dirty="0"/>
+              <a:rPr lang="ar-SA" dirty="0">
+                <a:latin typeface="Amiri" pitchFamily="2" charset="-78"/>
+                <a:ea typeface="Amiri" pitchFamily="2" charset="-78"/>
+                <a:cs typeface="Amiri" pitchFamily="2" charset="-78"/>
+              </a:rPr>
               <a:t>TOPIC CONVERSATION — Core. Examiner asks the questions in order and may add “لِمَاذَا؟ / هَلْ يُمْكِنُ أَنْ تَشْرَحَ أَكْثَرَ؟” to push for more. Candidate aims for one full sentence per question, with a time or a frequency word.
 </a:t>
             </a:r>
@@ -1332,7 +1344,11 @@
           <a:lstStyle/>
           <a:p>
             <a:r>
-              <a:rPr lang="en-US" dirty="0"/>
+              <a:rPr lang="ar-SA" dirty="0">
+                <a:latin typeface="Amiri" pitchFamily="2" charset="-78"/>
+                <a:ea typeface="Amiri" pitchFamily="2" charset="-78"/>
+                <a:cs typeface="Amiri" pitchFamily="2" charset="-78"/>
+              </a:rPr>
               <a:t>TOPIC CONVERSATION — Develop. Examiner asks the questions in order and may add “لِمَاذَا؟ / هَلْ يُمْكِنُ أَنْ تَشْرَحَ أَكْثَرَ؟” to push for more. Candidate aims for two or three sentences, with sequence words and a reason.
 </a:t>
             </a:r>
@@ -1421,7 +1437,11 @@
           <a:lstStyle/>
           <a:p>
             <a:r>
-              <a:rPr lang="en-US" dirty="0"/>
+              <a:rPr lang="ar-SA" dirty="0">
+                <a:latin typeface="Amiri" pitchFamily="2" charset="-78"/>
+                <a:ea typeface="Amiri" pitchFamily="2" charset="-78"/>
+                <a:cs typeface="Amiri" pitchFamily="2" charset="-78"/>
+              </a:rPr>
               <a:t>TOPIC CONVERSATION — Stretch. Examiner asks the questions in order and may add “لِمَاذَا؟ / هَلْ يُمْكِنُ أَنْ تَشْرَحَ أَكْثَرَ؟” to push for more. Candidate aims for a developed answer: opinion, reason, example, and more than one time frame.
 </a:t>
             </a:r>
@@ -1510,7 +1530,11 @@
           <a:lstStyle/>
           <a:p>
             <a:r>
-              <a:rPr lang="en-US" dirty="0"/>
+              <a:rPr lang="ar-SA" dirty="0">
+                <a:latin typeface="Amiri" pitchFamily="2" charset="-78"/>
+                <a:ea typeface="Amiri" pitchFamily="2" charset="-78"/>
+                <a:cs typeface="Amiri" pitchFamily="2" charset="-78"/>
+              </a:rPr>
               <a:t>WELCOME (1 min) — while students join.
 • Greet each student by name as they arrive: السَّلَامُ عَلَيْكُمْ. Take the register (Pastoral Tracker: attendance 0/1).
 • 2-MINUTE CHECK-IN (SEND training): a private chat to any student who seemed unsettled last lesson — “Are you okay today? 👍 / 👎”.
@@ -2224,7 +2248,11 @@
           <a:lstStyle/>
           <a:p>
             <a:r>
-              <a:rPr lang="en-US" dirty="0"/>
+              <a:rPr lang="ar-SA" dirty="0">
+                <a:latin typeface="Amiri" pitchFamily="2" charset="-78"/>
+                <a:ea typeface="Amiri" pitchFamily="2" charset="-78"/>
+                <a:cs typeface="Amiri" pitchFamily="2" charset="-78"/>
+              </a:rPr>
               <a:t>TEACH (3 min). Role play = precise and complete; conversation = develop. Choral repetition of the three repair phrases. To a girl: تُعِيدِي.</a:t>
             </a:r>
             <a:endParaRPr lang="en-US" dirty="0"/>
@@ -2312,7 +2340,11 @@
           <a:lstStyle/>
           <a:p>
             <a:r>
-              <a:rPr lang="en-US" dirty="0"/>
+              <a:rPr lang="ar-SA" dirty="0">
+                <a:latin typeface="Amiri" pitchFamily="2" charset="-78"/>
+                <a:ea typeface="Amiri" pitchFamily="2" charset="-78"/>
+                <a:cs typeface="Amiri" pitchFamily="2" charset="-78"/>
+              </a:rPr>
               <a:t>LANGUAGE BANK (2 min) — the AT-A-L01 verbs with the four forms students need in the exam: I (أَـ), he (يَـ), she (تَـ), they (يَـ…ونَ). Say “I” → “she” for each: أَسْتَيْقِظُ → تَسْتَيْقِظُ.</a:t>
             </a:r>
             <a:endParaRPr lang="en-US" dirty="0"/>
@@ -2400,7 +2432,11 @@
           <a:lstStyle/>
           <a:p>
             <a:r>
-              <a:rPr lang="en-US" dirty="0"/>
+              <a:rPr lang="ar-SA" dirty="0">
+                <a:latin typeface="Amiri" pitchFamily="2" charset="-78"/>
+                <a:ea typeface="Amiri" pitchFamily="2" charset="-78"/>
+                <a:cs typeface="Amiri" pitchFamily="2" charset="-78"/>
+              </a:rPr>
               <a:t>LANGUAGE BANK (2 min) — adjectives with m. / f. / pl. (a girl says: أَنَا نَاعِسَةٌ / مُتْعَبَةٌ), plus frequency and time adverbs that lift every answer.</a:t>
             </a:r>
             <a:endParaRPr lang="en-US" dirty="0"/>
@@ -2576,7 +2612,11 @@
           <a:lstStyle/>
           <a:p>
             <a:r>
-              <a:rPr lang="en-US" dirty="0"/>
+              <a:rPr lang="ar-SA" dirty="0">
+                <a:latin typeface="Amiri" pitchFamily="2" charset="-78"/>
+                <a:ea typeface="Amiri" pitchFamily="2" charset="-78"/>
+                <a:cs typeface="Amiri" pitchFamily="2" charset="-78"/>
+              </a:rPr>
               <a:t>ROLE PLAY A (Core) — at a summer camp.
 SET-UP IN THE BREAKOUT ROOM: A = examiner (reads the left column ONLY — the questions, in order), B = candidate (sees the task column; Core may use the help column), C = observer (ticks the feedback checklist). 1 minute preparation, about 3 minutes speaking, 1 minute feedback, then rotate.
 Task ! is the unexpected question: in the exam the candidate has not seen it — the examiner should read it without warning.
@@ -2668,7 +2708,11 @@
           <a:lstStyle/>
           <a:p>
             <a:r>
-              <a:rPr lang="en-US" dirty="0"/>
+              <a:rPr lang="ar-SA" dirty="0">
+                <a:latin typeface="Amiri" pitchFamily="2" charset="-78"/>
+                <a:ea typeface="Amiri" pitchFamily="2" charset="-78"/>
+                <a:cs typeface="Amiri" pitchFamily="2" charset="-78"/>
+              </a:rPr>
               <a:t>ROLE PLAY B (Core+) — a phone call with your host family.
 SET-UP IN THE BREAKOUT ROOM: A = examiner (reads the left column ONLY — the questions, in order), B = candidate (sees the task column; Core may use the help column), C = observer (ticks the feedback checklist). 1 minute preparation, about 3 minutes speaking, 1 minute feedback, then rotate.
 Task ! is the unexpected question: in the exam the candidate has not seen it — the examiner should read it without warning.
@@ -3156,6 +3200,7 @@
                   <a:srgbClr val="D4AF37"/>
                 </a:solidFill>
                 <a:latin typeface="Amiri" pitchFamily="2" charset="-78"/>
+                <a:ea typeface="Amiri" pitchFamily="2" charset="-78"/>
                 <a:cs typeface="Amiri" pitchFamily="2" charset="-78"/>
               </a:rPr>
               <a:t>م</a:t>
@@ -3362,6 +3407,7 @@
                   <a:srgbClr val="D4AF37"/>
                 </a:solidFill>
                 <a:latin typeface="Amiri" pitchFamily="2" charset="-78"/>
+                <a:ea typeface="Amiri" pitchFamily="2" charset="-78"/>
                 <a:cs typeface="Amiri" pitchFamily="2" charset="-78"/>
               </a:rPr>
               <a:t>وَرْشَةُ التَّحَدُّثِ — الوَقْتُ وَالرُّوتِينُ اليَوْمِيُّ</a:t>
@@ -3819,6 +3865,7 @@
                   <a:srgbClr val="D4AF37"/>
                 </a:solidFill>
                 <a:latin typeface="Amiri" pitchFamily="2" charset="-78"/>
+                <a:ea typeface="Amiri" pitchFamily="2" charset="-78"/>
                 <a:cs typeface="Amiri" pitchFamily="2" charset="-78"/>
               </a:rPr>
               <a:t>م</a:t>
@@ -4139,6 +4186,7 @@
                   <a:srgbClr val="8A6D1E"/>
                 </a:solidFill>
                 <a:latin typeface="Amiri" pitchFamily="2" charset="-78"/>
+                <a:ea typeface="Amiri" pitchFamily="2" charset="-78"/>
                 <a:cs typeface="Amiri" pitchFamily="2" charset="-78"/>
               </a:rPr>
               <a:t>فِي النَّادِي الرِّيَاضِيِّ</a:t>
@@ -4419,6 +4467,7 @@
                   <a:srgbClr val="1B3B6F"/>
                 </a:solidFill>
                 <a:latin typeface="Amiri" pitchFamily="2" charset="-78"/>
+                <a:ea typeface="Amiri" pitchFamily="2" charset="-78"/>
                 <a:cs typeface="Amiri" pitchFamily="2" charset="-78"/>
               </a:rPr>
               <a:t>أُرِيدُ أَنْ أَشْتَرِكَ فِي …</a:t>
@@ -4495,6 +4544,7 @@
                   <a:srgbClr val="1B3B6F"/>
                 </a:solidFill>
                 <a:latin typeface="Amiri" pitchFamily="2" charset="-78"/>
+                <a:ea typeface="Amiri" pitchFamily="2" charset="-78"/>
                 <a:cs typeface="Amiri" pitchFamily="2" charset="-78"/>
               </a:rPr>
               <a:t>أَهْلًا بِكَ فِي النَّادِي. كَيْفَ أُسَاعِدُكَ؟</a:t>
@@ -4598,6 +4648,7 @@
                   <a:srgbClr val="1B3B6F"/>
                 </a:solidFill>
                 <a:latin typeface="Amiri" pitchFamily="2" charset="-78"/>
+                <a:ea typeface="Amiri" pitchFamily="2" charset="-78"/>
                 <a:cs typeface="Amiri" pitchFamily="2" charset="-78"/>
               </a:rPr>
               <a:t>يُنَاسِبُنِي … لِأَنِّي …</a:t>
@@ -4674,6 +4725,7 @@
                   <a:srgbClr val="1B3B6F"/>
                 </a:solidFill>
                 <a:latin typeface="Amiri" pitchFamily="2" charset="-78"/>
+                <a:ea typeface="Amiri" pitchFamily="2" charset="-78"/>
                 <a:cs typeface="Amiri" pitchFamily="2" charset="-78"/>
               </a:rPr>
               <a:t>عِنْدَنَا دُرُوسٌ صَبَاحًا وَمَسَاءً. أَيُّ وَقْتٍ يُنَاسِبُكَ؟</a:t>
@@ -4777,6 +4829,7 @@
                   <a:srgbClr val="1B3B6F"/>
                 </a:solidFill>
                 <a:latin typeface="Amiri" pitchFamily="2" charset="-78"/>
+                <a:ea typeface="Amiri" pitchFamily="2" charset="-78"/>
                 <a:cs typeface="Amiri" pitchFamily="2" charset="-78"/>
               </a:rPr>
               <a:t>أَصِلُ … ثُمَّ … وَأَخِيرًا …</a:t>
@@ -4853,6 +4906,7 @@
                   <a:srgbClr val="1B3B6F"/>
                 </a:solidFill>
                 <a:latin typeface="Amiri" pitchFamily="2" charset="-78"/>
+                <a:ea typeface="Amiri" pitchFamily="2" charset="-78"/>
                 <a:cs typeface="Amiri" pitchFamily="2" charset="-78"/>
               </a:rPr>
               <a:t>صِفْ لِي يَوْمَكَ بَعْدَ المَدْرَسَةِ.</a:t>
@@ -4956,6 +5010,7 @@
                   <a:srgbClr val="1B3B6F"/>
                 </a:solidFill>
                 <a:latin typeface="Amiri" pitchFamily="2" charset="-78"/>
+                <a:ea typeface="Amiri" pitchFamily="2" charset="-78"/>
                 <a:cs typeface="Amiri" pitchFamily="2" charset="-78"/>
               </a:rPr>
               <a:t>كَمْ دَقِيقَةً …؟</a:t>
@@ -5032,6 +5087,7 @@
                   <a:srgbClr val="1B3B6F"/>
                 </a:solidFill>
                 <a:latin typeface="Amiri" pitchFamily="2" charset="-78"/>
+                <a:ea typeface="Amiri" pitchFamily="2" charset="-78"/>
                 <a:cs typeface="Amiri" pitchFamily="2" charset="-78"/>
               </a:rPr>
               <a:t>… يَسْتَغْرِقُ الدَّرْسُ سَاعَةً وَاحِدَةً.</a:t>
@@ -5135,6 +5191,7 @@
                   <a:srgbClr val="1B3B6F"/>
                 </a:solidFill>
                 <a:latin typeface="Amiri" pitchFamily="2" charset="-78"/>
+                <a:ea typeface="Amiri" pitchFamily="2" charset="-78"/>
                 <a:cs typeface="Amiri" pitchFamily="2" charset="-78"/>
               </a:rPr>
               <a:t>مَرَّةً / مَرَّتَيْنِ / ثَلَاثَ مَرَّاتٍ</a:t>
@@ -5211,6 +5268,7 @@
                   <a:srgbClr val="1B3B6F"/>
                 </a:solidFill>
                 <a:latin typeface="Amiri" pitchFamily="2" charset="-78"/>
+                <a:ea typeface="Amiri" pitchFamily="2" charset="-78"/>
                 <a:cs typeface="Amiri" pitchFamily="2" charset="-78"/>
               </a:rPr>
               <a:t>كَمْ مَرَّةً تُمَارِسُ الرِّيَاضَةَ فِي الأُسْبُوعِ؟</a:t>
@@ -5420,6 +5478,7 @@
                   <a:srgbClr val="D4AF37"/>
                 </a:solidFill>
                 <a:latin typeface="Amiri" pitchFamily="2" charset="-78"/>
+                <a:ea typeface="Amiri" pitchFamily="2" charset="-78"/>
                 <a:cs typeface="Amiri" pitchFamily="2" charset="-78"/>
               </a:rPr>
               <a:t>م</a:t>
@@ -5740,6 +5799,7 @@
                   <a:srgbClr val="8A6D1E"/>
                 </a:solidFill>
                 <a:latin typeface="Amiri" pitchFamily="2" charset="-78"/>
+                <a:ea typeface="Amiri" pitchFamily="2" charset="-78"/>
                 <a:cs typeface="Amiri" pitchFamily="2" charset="-78"/>
               </a:rPr>
               <a:t>مُقَابَلَةٌ مَعَ إِذَاعَةِ المَدْرَسَةِ</a:t>
@@ -6020,6 +6080,7 @@
                   <a:srgbClr val="1B3B6F"/>
                 </a:solidFill>
                 <a:latin typeface="Amiri" pitchFamily="2" charset="-78"/>
+                <a:ea typeface="Amiri" pitchFamily="2" charset="-78"/>
                 <a:cs typeface="Amiri" pitchFamily="2" charset="-78"/>
               </a:rPr>
               <a:t>بَعْدَ أَنْ أَتَوَضَّأَ …</a:t>
@@ -6096,6 +6157,7 @@
                   <a:srgbClr val="1B3B6F"/>
                 </a:solidFill>
                 <a:latin typeface="Amiri" pitchFamily="2" charset="-78"/>
+                <a:ea typeface="Amiri" pitchFamily="2" charset="-78"/>
                 <a:cs typeface="Amiri" pitchFamily="2" charset="-78"/>
               </a:rPr>
               <a:t>صِفْ لَنَا يَوْمًا عَادِيًّا فِي حَيَاتِكَ.</a:t>
@@ -6199,6 +6261,7 @@
                   <a:srgbClr val="1B3B6F"/>
                 </a:solidFill>
                 <a:latin typeface="Amiri" pitchFamily="2" charset="-78"/>
+                <a:ea typeface="Amiri" pitchFamily="2" charset="-78"/>
                 <a:cs typeface="Amiri" pitchFamily="2" charset="-78"/>
               </a:rPr>
               <a:t>أَمَّا فِي العُطْلَةِ فَأَسْتَيْقِظُ …</a:t>
@@ -6275,6 +6338,7 @@
                   <a:srgbClr val="1B3B6F"/>
                 </a:solidFill>
                 <a:latin typeface="Amiri" pitchFamily="2" charset="-78"/>
+                <a:ea typeface="Amiri" pitchFamily="2" charset="-78"/>
                 <a:cs typeface="Amiri" pitchFamily="2" charset="-78"/>
               </a:rPr>
               <a:t>مَا الفَرْقُ بَيْنَ أَيَّامِ الدِّرَاسَةِ وَالعُطْلَةِ؟</a:t>
@@ -6378,6 +6442,7 @@
                   <a:srgbClr val="1B3B6F"/>
                 </a:solidFill>
                 <a:latin typeface="Amiri" pitchFamily="2" charset="-78"/>
+                <a:ea typeface="Amiri" pitchFamily="2" charset="-78"/>
                 <a:cs typeface="Amiri" pitchFamily="2" charset="-78"/>
               </a:rPr>
               <a:t>رَجَعْتُ … ثُمَّ …</a:t>
@@ -6454,6 +6519,7 @@
                   <a:srgbClr val="1B3B6F"/>
                 </a:solidFill>
                 <a:latin typeface="Amiri" pitchFamily="2" charset="-78"/>
+                <a:ea typeface="Amiri" pitchFamily="2" charset="-78"/>
                 <a:cs typeface="Amiri" pitchFamily="2" charset="-78"/>
               </a:rPr>
               <a:t>مَاذَا فَعَلْتَ أَمْسِ بَعْدَ المَدْرَسَةِ؟</a:t>
@@ -6557,6 +6623,7 @@
                   <a:srgbClr val="1B3B6F"/>
                 </a:solidFill>
                 <a:latin typeface="Amiri" pitchFamily="2" charset="-78"/>
+                <a:ea typeface="Amiri" pitchFamily="2" charset="-78"/>
                 <a:cs typeface="Amiri" pitchFamily="2" charset="-78"/>
               </a:rPr>
               <a:t>أَعْتَقِدُ أَنَّهُ … لٰكِنَّنِي …</a:t>
@@ -6633,6 +6700,7 @@
                   <a:srgbClr val="1B3B6F"/>
                 </a:solidFill>
                 <a:latin typeface="Amiri" pitchFamily="2" charset="-78"/>
+                <a:ea typeface="Amiri" pitchFamily="2" charset="-78"/>
                 <a:cs typeface="Amiri" pitchFamily="2" charset="-78"/>
               </a:rPr>
               <a:t>هَلْ رُوتِينُكَ صِحِّيٌّ فِي رَأْيِكَ؟ لِمَاذَا؟</a:t>
@@ -6736,6 +6804,7 @@
                   <a:srgbClr val="1B3B6F"/>
                 </a:solidFill>
                 <a:latin typeface="Amiri" pitchFamily="2" charset="-78"/>
+                <a:ea typeface="Amiri" pitchFamily="2" charset="-78"/>
                 <a:cs typeface="Amiri" pitchFamily="2" charset="-78"/>
               </a:rPr>
               <a:t>سَأُحَاوِلُ أَنْ …</a:t>
@@ -6812,6 +6881,7 @@
                   <a:srgbClr val="1B3B6F"/>
                 </a:solidFill>
                 <a:latin typeface="Amiri" pitchFamily="2" charset="-78"/>
+                <a:ea typeface="Amiri" pitchFamily="2" charset="-78"/>
                 <a:cs typeface="Amiri" pitchFamily="2" charset="-78"/>
               </a:rPr>
               <a:t>مَاذَا سَتُغَيِّرُ فِي رُوتِينِكَ فِي المُسْتَقْبَلِ؟</a:t>
@@ -7021,6 +7091,7 @@
                   <a:srgbClr val="D4AF37"/>
                 </a:solidFill>
                 <a:latin typeface="Amiri" pitchFamily="2" charset="-78"/>
+                <a:ea typeface="Amiri" pitchFamily="2" charset="-78"/>
                 <a:cs typeface="Amiri" pitchFamily="2" charset="-78"/>
               </a:rPr>
               <a:t>م</a:t>
@@ -7341,6 +7412,7 @@
                   <a:srgbClr val="8A6D1E"/>
                 </a:solidFill>
                 <a:latin typeface="Amiri" pitchFamily="2" charset="-78"/>
+                <a:ea typeface="Amiri" pitchFamily="2" charset="-78"/>
                 <a:cs typeface="Amiri" pitchFamily="2" charset="-78"/>
               </a:rPr>
               <a:t>وَرَقَةُ المُلَاحِظِ</a:t>
@@ -8335,6 +8407,7 @@
                   <a:srgbClr val="5A6472"/>
                 </a:solidFill>
                 <a:latin typeface="Amiri" pitchFamily="2" charset="-78"/>
+                <a:ea typeface="Amiri" pitchFamily="2" charset="-78"/>
                 <a:cs typeface="Amiri" pitchFamily="2" charset="-78"/>
               </a:rPr>
               <a:t>لِأَنَّ</a:t>
@@ -8361,6 +8434,7 @@
                   <a:srgbClr val="5A6472"/>
                 </a:solidFill>
                 <a:latin typeface="Amiri" pitchFamily="2" charset="-78"/>
+                <a:ea typeface="Amiri" pitchFamily="2" charset="-78"/>
                 <a:cs typeface="Amiri" pitchFamily="2" charset="-78"/>
               </a:rPr>
               <a:t>فِي رَأْيِي</a:t>
@@ -8863,6 +8937,7 @@
                   <a:srgbClr val="D4AF37"/>
                 </a:solidFill>
                 <a:latin typeface="Amiri" pitchFamily="2" charset="-78"/>
+                <a:ea typeface="Amiri" pitchFamily="2" charset="-78"/>
                 <a:cs typeface="Amiri" pitchFamily="2" charset="-78"/>
               </a:rPr>
               <a:t>م</a:t>
@@ -9183,6 +9258,7 @@
                   <a:srgbClr val="8A6D1E"/>
                 </a:solidFill>
                 <a:latin typeface="Amiri" pitchFamily="2" charset="-78"/>
+                <a:ea typeface="Amiri" pitchFamily="2" charset="-78"/>
                 <a:cs typeface="Amiri" pitchFamily="2" charset="-78"/>
               </a:rPr>
               <a:t>نَمُوذَجُ الإِجَابَةِ</a:t>
@@ -9425,6 +9501,7 @@
                   <a:srgbClr val="1B3B6F"/>
                 </a:solidFill>
                 <a:latin typeface="Amiri" pitchFamily="2" charset="-78"/>
+                <a:ea typeface="Amiri" pitchFamily="2" charset="-78"/>
                 <a:cs typeface="Amiri" pitchFamily="2" charset="-78"/>
               </a:rPr>
               <a:t>اسْمِي آدَمُ، وَعُمْرِي أَرْبَعَ عَشْرَةَ سَنَةً.</a:t>
@@ -9501,6 +9578,7 @@
                   <a:srgbClr val="1B3B6F"/>
                 </a:solidFill>
                 <a:latin typeface="Amiri" pitchFamily="2" charset="-78"/>
+                <a:ea typeface="Amiri" pitchFamily="2" charset="-78"/>
                 <a:cs typeface="Amiri" pitchFamily="2" charset="-78"/>
               </a:rPr>
               <a:t>أَهْلًا وَسَهْلًا! مَا اسْمُكَ، وَكَمْ عُمْرُكَ؟</a:t>
@@ -9604,6 +9682,7 @@
                   <a:srgbClr val="1B3B6F"/>
                 </a:solidFill>
                 <a:latin typeface="Amiri" pitchFamily="2" charset="-78"/>
+                <a:ea typeface="Amiri" pitchFamily="2" charset="-78"/>
                 <a:cs typeface="Amiri" pitchFamily="2" charset="-78"/>
               </a:rPr>
               <a:t>أَسْتَيْقِظُ عَادَةً فِي السَّاعَةِ السَّادِسَةِ وَالنِّصْفِ.</a:t>
@@ -9680,6 +9759,7 @@
                   <a:srgbClr val="1B3B6F"/>
                 </a:solidFill>
                 <a:latin typeface="Amiri" pitchFamily="2" charset="-78"/>
+                <a:ea typeface="Amiri" pitchFamily="2" charset="-78"/>
                 <a:cs typeface="Amiri" pitchFamily="2" charset="-78"/>
               </a:rPr>
               <a:t>فِي أَيِّ سَاعَةٍ تَسْتَيْقِظُ عَادَةً؟</a:t>
@@ -9783,6 +9863,7 @@
                   <a:srgbClr val="1B3B6F"/>
                 </a:solidFill>
                 <a:latin typeface="Amiri" pitchFamily="2" charset="-78"/>
+                <a:ea typeface="Amiri" pitchFamily="2" charset="-78"/>
                 <a:cs typeface="Amiri" pitchFamily="2" charset="-78"/>
               </a:rPr>
               <a:t>أَتَنَاوَلُ الخُبْزَ وَالجُبْنَ، وَأَشْرَبُ الحَلِيبَ.</a:t>
@@ -9859,6 +9940,7 @@
                   <a:srgbClr val="1B3B6F"/>
                 </a:solidFill>
                 <a:latin typeface="Amiri" pitchFamily="2" charset="-78"/>
+                <a:ea typeface="Amiri" pitchFamily="2" charset="-78"/>
                 <a:cs typeface="Amiri" pitchFamily="2" charset="-78"/>
               </a:rPr>
               <a:t>مَاذَا تَتَنَاوَلُ فِي الإِفْطَارِ؟</a:t>
@@ -9962,6 +10044,7 @@
                   <a:srgbClr val="1B3B6F"/>
                 </a:solidFill>
                 <a:latin typeface="Amiri" pitchFamily="2" charset="-78"/>
+                <a:ea typeface="Amiri" pitchFamily="2" charset="-78"/>
                 <a:cs typeface="Amiri" pitchFamily="2" charset="-78"/>
               </a:rPr>
               <a:t>أَسْتَقِلُّ الحَافِلَةَ، وَأَصِلُ إِلَى المَدْرَسَةِ فِي الثَّامِنَةِ.</a:t>
@@ -10038,6 +10121,7 @@
                   <a:srgbClr val="1B3B6F"/>
                 </a:solidFill>
                 <a:latin typeface="Amiri" pitchFamily="2" charset="-78"/>
+                <a:ea typeface="Amiri" pitchFamily="2" charset="-78"/>
                 <a:cs typeface="Amiri" pitchFamily="2" charset="-78"/>
               </a:rPr>
               <a:t>كَيْفَ تَذْهَبُ إِلَى المَدْرَسَةِ؟</a:t>
@@ -10141,6 +10225,7 @@
                   <a:srgbClr val="1B3B6F"/>
                 </a:solidFill>
                 <a:latin typeface="Amiri" pitchFamily="2" charset="-78"/>
+                <a:ea typeface="Amiri" pitchFamily="2" charset="-78"/>
                 <a:cs typeface="Amiri" pitchFamily="2" charset="-78"/>
               </a:rPr>
               <a:t>بَعْدَ المَدْرَسَةِ أَتَنَاوَلُ الغَدَاءَ، ثُمَّ أَدْرُسُ.</a:t>
@@ -10217,6 +10302,7 @@
                   <a:srgbClr val="1B3B6F"/>
                 </a:solidFill>
                 <a:latin typeface="Amiri" pitchFamily="2" charset="-78"/>
+                <a:ea typeface="Amiri" pitchFamily="2" charset="-78"/>
                 <a:cs typeface="Amiri" pitchFamily="2" charset="-78"/>
               </a:rPr>
               <a:t>وَمَاذَا تَفْعَلُ بَعْدَ المَدْرَسَةِ؟</a:t>
@@ -10426,6 +10512,7 @@
                   <a:srgbClr val="D4AF37"/>
                 </a:solidFill>
                 <a:latin typeface="Amiri" pitchFamily="2" charset="-78"/>
+                <a:ea typeface="Amiri" pitchFamily="2" charset="-78"/>
                 <a:cs typeface="Amiri" pitchFamily="2" charset="-78"/>
               </a:rPr>
               <a:t>م</a:t>
@@ -10746,6 +10833,7 @@
                   <a:srgbClr val="8A6D1E"/>
                 </a:solidFill>
                 <a:latin typeface="Amiri" pitchFamily="2" charset="-78"/>
+                <a:ea typeface="Amiri" pitchFamily="2" charset="-78"/>
                 <a:cs typeface="Amiri" pitchFamily="2" charset="-78"/>
               </a:rPr>
               <a:t>نَمُوذَجُ الإِجَابَةِ</a:t>
@@ -10988,6 +11076,7 @@
                   <a:srgbClr val="1B3B6F"/>
                 </a:solidFill>
                 <a:latin typeface="Amiri" pitchFamily="2" charset="-78"/>
+                <a:ea typeface="Amiri" pitchFamily="2" charset="-78"/>
                 <a:cs typeface="Amiri" pitchFamily="2" charset="-78"/>
               </a:rPr>
               <a:t>فِي أَيَّامِ المَدْرَسَةِ أَسْتَيْقِظُ مُبَكِّرًا، فِي السَّاعَةِ السَّادِسَةِ.</a:t>
@@ -11064,6 +11153,7 @@
                   <a:srgbClr val="1B3B6F"/>
                 </a:solidFill>
                 <a:latin typeface="Amiri" pitchFamily="2" charset="-78"/>
+                <a:ea typeface="Amiri" pitchFamily="2" charset="-78"/>
                 <a:cs typeface="Amiri" pitchFamily="2" charset="-78"/>
               </a:rPr>
               <a:t>مَتَى تَسْتَيْقِظُ فِي أَيَّامِ المَدْرَسَةِ؟</a:t>
@@ -11167,6 +11257,7 @@
                   <a:srgbClr val="1B3B6F"/>
                 </a:solidFill>
                 <a:latin typeface="Amiri" pitchFamily="2" charset="-78"/>
+                <a:ea typeface="Amiri" pitchFamily="2" charset="-78"/>
                 <a:cs typeface="Amiri" pitchFamily="2" charset="-78"/>
               </a:rPr>
               <a:t>فِي نِهَايَةِ الأُسْبُوعِ أَسْتَيْقِظُ مُتَأَخِّرًا، لِأَنِّي أُحِبُّ النَّوْمَ!</a:t>
@@ -11243,6 +11334,7 @@
                   <a:srgbClr val="1B3B6F"/>
                 </a:solidFill>
                 <a:latin typeface="Amiri" pitchFamily="2" charset="-78"/>
+                <a:ea typeface="Amiri" pitchFamily="2" charset="-78"/>
                 <a:cs typeface="Amiri" pitchFamily="2" charset="-78"/>
               </a:rPr>
               <a:t>وَفِي نِهَايَةِ الأُسْبُوعِ؟</a:t>
@@ -11346,6 +11438,7 @@
                   <a:srgbClr val="1B3B6F"/>
                 </a:solidFill>
                 <a:latin typeface="Amiri" pitchFamily="2" charset="-78"/>
+                <a:ea typeface="Amiri" pitchFamily="2" charset="-78"/>
                 <a:cs typeface="Amiri" pitchFamily="2" charset="-78"/>
               </a:rPr>
               <a:t>أَوَّلًا أَغْتَسِلُ، ثُمَّ أَرْتَدِي مَلَابِسِي، وَبَعْدَ ذٰلِكَ أَتَنَاوَلُ الإِفْطَارَ.</a:t>
@@ -11422,6 +11515,7 @@
                   <a:srgbClr val="1B3B6F"/>
                 </a:solidFill>
                 <a:latin typeface="Amiri" pitchFamily="2" charset="-78"/>
+                <a:ea typeface="Amiri" pitchFamily="2" charset="-78"/>
                 <a:cs typeface="Amiri" pitchFamily="2" charset="-78"/>
               </a:rPr>
               <a:t>مَاذَا تَفْعَلُ فِي الصَّبَاحِ قَبْلَ المَدْرَسَةِ؟</a:t>
@@ -11525,6 +11619,7 @@
                   <a:srgbClr val="1B3B6F"/>
                 </a:solidFill>
                 <a:latin typeface="Amiri" pitchFamily="2" charset="-78"/>
+                <a:ea typeface="Amiri" pitchFamily="2" charset="-78"/>
                 <a:cs typeface="Amiri" pitchFamily="2" charset="-78"/>
               </a:rPr>
               <a:t>فِي أَيِّ سَاعَةٍ تَتَنَاوَلُونَ الإِفْطَارَ؟</a:t>
@@ -11601,6 +11696,7 @@
                   <a:srgbClr val="1B3B6F"/>
                 </a:solidFill>
                 <a:latin typeface="Amiri" pitchFamily="2" charset="-78"/>
+                <a:ea typeface="Amiri" pitchFamily="2" charset="-78"/>
                 <a:cs typeface="Amiri" pitchFamily="2" charset="-78"/>
               </a:rPr>
               <a:t>… نَتَنَاوَلُ الإِفْطَارَ فِي السَّابِعَةِ.</a:t>
@@ -11704,6 +11800,7 @@
                   <a:srgbClr val="1B3B6F"/>
                 </a:solidFill>
                 <a:latin typeface="Amiri" pitchFamily="2" charset="-78"/>
+                <a:ea typeface="Amiri" pitchFamily="2" charset="-78"/>
                 <a:cs typeface="Amiri" pitchFamily="2" charset="-78"/>
               </a:rPr>
               <a:t>نَعَمْ، أَحْتَاجُ إِلَى مُنَبِّهٍ، لِأَنِّي أَكُونُ نَاعِسًا فِي الصَّبَاحِ.</a:t>
@@ -11780,6 +11877,7 @@
                   <a:srgbClr val="1B3B6F"/>
                 </a:solidFill>
                 <a:latin typeface="Amiri" pitchFamily="2" charset="-78"/>
+                <a:ea typeface="Amiri" pitchFamily="2" charset="-78"/>
                 <a:cs typeface="Amiri" pitchFamily="2" charset="-78"/>
               </a:rPr>
               <a:t>هَلْ تَحْتَاجُ إِلَى شَيْءٍ فِي الصَّبَاحِ؟</a:t>
@@ -11989,6 +12087,7 @@
                   <a:srgbClr val="D4AF37"/>
                 </a:solidFill>
                 <a:latin typeface="Amiri" pitchFamily="2" charset="-78"/>
+                <a:ea typeface="Amiri" pitchFamily="2" charset="-78"/>
                 <a:cs typeface="Amiri" pitchFamily="2" charset="-78"/>
               </a:rPr>
               <a:t>م</a:t>
@@ -12309,6 +12408,7 @@
                   <a:srgbClr val="8A6D1E"/>
                 </a:solidFill>
                 <a:latin typeface="Amiri" pitchFamily="2" charset="-78"/>
+                <a:ea typeface="Amiri" pitchFamily="2" charset="-78"/>
                 <a:cs typeface="Amiri" pitchFamily="2" charset="-78"/>
               </a:rPr>
               <a:t>نَمُوذَجُ الإِجَابَةِ</a:t>
@@ -12551,6 +12651,7 @@
                   <a:srgbClr val="1B3B6F"/>
                 </a:solidFill>
                 <a:latin typeface="Amiri" pitchFamily="2" charset="-78"/>
+                <a:ea typeface="Amiri" pitchFamily="2" charset="-78"/>
                 <a:cs typeface="Amiri" pitchFamily="2" charset="-78"/>
               </a:rPr>
               <a:t>أُرِيدُ أَنْ أَشْتَرِكَ فِي دَرْسِ السِّبَاحَةِ، مِنْ فَضْلِكَ.</a:t>
@@ -12627,6 +12728,7 @@
                   <a:srgbClr val="1B3B6F"/>
                 </a:solidFill>
                 <a:latin typeface="Amiri" pitchFamily="2" charset="-78"/>
+                <a:ea typeface="Amiri" pitchFamily="2" charset="-78"/>
                 <a:cs typeface="Amiri" pitchFamily="2" charset="-78"/>
               </a:rPr>
               <a:t>أَهْلًا بِكَ فِي النَّادِي. كَيْفَ أُسَاعِدُكَ؟</a:t>
@@ -12730,6 +12832,7 @@
                   <a:srgbClr val="1B3B6F"/>
                 </a:solidFill>
                 <a:latin typeface="Amiri" pitchFamily="2" charset="-78"/>
+                <a:ea typeface="Amiri" pitchFamily="2" charset="-78"/>
                 <a:cs typeface="Amiri" pitchFamily="2" charset="-78"/>
               </a:rPr>
               <a:t>يُنَاسِبُنِي المَسَاءُ، لِأَنِّي فِي المَدْرَسَةِ مِنَ الثَّامِنَةِ إِلَى الثَّالِثَةِ.</a:t>
@@ -12806,6 +12909,7 @@
                   <a:srgbClr val="1B3B6F"/>
                 </a:solidFill>
                 <a:latin typeface="Amiri" pitchFamily="2" charset="-78"/>
+                <a:ea typeface="Amiri" pitchFamily="2" charset="-78"/>
                 <a:cs typeface="Amiri" pitchFamily="2" charset="-78"/>
               </a:rPr>
               <a:t>عِنْدَنَا دُرُوسٌ صَبَاحًا وَمَسَاءً. أَيُّ وَقْتٍ يُنَاسِبُكَ؟</a:t>
@@ -12909,6 +13013,7 @@
                   <a:srgbClr val="1B3B6F"/>
                 </a:solidFill>
                 <a:latin typeface="Amiri" pitchFamily="2" charset="-78"/>
+                <a:ea typeface="Amiri" pitchFamily="2" charset="-78"/>
                 <a:cs typeface="Amiri" pitchFamily="2" charset="-78"/>
               </a:rPr>
               <a:t>أَصِلُ إِلَى البَيْتِ فِي الرَّابِعَةِ، ثُمَّ أَتَنَاوَلُ الغَدَاءَ وَأُنْهِي وَاجِبَاتِي، وَأَخِيرًا أَرْتَاحُ قَلِيلًا.</a:t>
@@ -12985,6 +13090,7 @@
                   <a:srgbClr val="1B3B6F"/>
                 </a:solidFill>
                 <a:latin typeface="Amiri" pitchFamily="2" charset="-78"/>
+                <a:ea typeface="Amiri" pitchFamily="2" charset="-78"/>
                 <a:cs typeface="Amiri" pitchFamily="2" charset="-78"/>
               </a:rPr>
               <a:t>صِفْ لِي يَوْمَكَ بَعْدَ المَدْرَسَةِ.</a:t>
@@ -13088,6 +13194,7 @@
                   <a:srgbClr val="1B3B6F"/>
                 </a:solidFill>
                 <a:latin typeface="Amiri" pitchFamily="2" charset="-78"/>
+                <a:ea typeface="Amiri" pitchFamily="2" charset="-78"/>
                 <a:cs typeface="Amiri" pitchFamily="2" charset="-78"/>
               </a:rPr>
               <a:t>كَمْ دَقِيقَةً يَسْتَغْرِقُ الدَّرْسُ؟</a:t>
@@ -13164,6 +13271,7 @@
                   <a:srgbClr val="1B3B6F"/>
                 </a:solidFill>
                 <a:latin typeface="Amiri" pitchFamily="2" charset="-78"/>
+                <a:ea typeface="Amiri" pitchFamily="2" charset="-78"/>
                 <a:cs typeface="Amiri" pitchFamily="2" charset="-78"/>
               </a:rPr>
               <a:t>… يَسْتَغْرِقُ الدَّرْسُ سَاعَةً وَاحِدَةً.</a:t>
@@ -13267,6 +13375,7 @@
                   <a:srgbClr val="1B3B6F"/>
                 </a:solidFill>
                 <a:latin typeface="Amiri" pitchFamily="2" charset="-78"/>
+                <a:ea typeface="Amiri" pitchFamily="2" charset="-78"/>
                 <a:cs typeface="Amiri" pitchFamily="2" charset="-78"/>
               </a:rPr>
               <a:t>أُمَارِسُ الرِّيَاضَةَ مَرَّتَيْنِ فِي الأُسْبُوعِ عَادَةً، وَأَحْيَانًا ثَلَاثَ مَرَّاتٍ.</a:t>
@@ -13343,6 +13452,7 @@
                   <a:srgbClr val="1B3B6F"/>
                 </a:solidFill>
                 <a:latin typeface="Amiri" pitchFamily="2" charset="-78"/>
+                <a:ea typeface="Amiri" pitchFamily="2" charset="-78"/>
                 <a:cs typeface="Amiri" pitchFamily="2" charset="-78"/>
               </a:rPr>
               <a:t>كَمْ مَرَّةً تُمَارِسُ الرِّيَاضَةَ فِي الأُسْبُوعِ؟</a:t>
@@ -13552,6 +13662,7 @@
                   <a:srgbClr val="D4AF37"/>
                 </a:solidFill>
                 <a:latin typeface="Amiri" pitchFamily="2" charset="-78"/>
+                <a:ea typeface="Amiri" pitchFamily="2" charset="-78"/>
                 <a:cs typeface="Amiri" pitchFamily="2" charset="-78"/>
               </a:rPr>
               <a:t>م</a:t>
@@ -13872,6 +13983,7 @@
                   <a:srgbClr val="8A6D1E"/>
                 </a:solidFill>
                 <a:latin typeface="Amiri" pitchFamily="2" charset="-78"/>
+                <a:ea typeface="Amiri" pitchFamily="2" charset="-78"/>
                 <a:cs typeface="Amiri" pitchFamily="2" charset="-78"/>
               </a:rPr>
               <a:t>نَمُوذَجُ الإِجَابَةِ</a:t>
@@ -14114,6 +14226,7 @@
                   <a:srgbClr val="1B3B6F"/>
                 </a:solidFill>
                 <a:latin typeface="Amiri" pitchFamily="2" charset="-78"/>
+                <a:ea typeface="Amiri" pitchFamily="2" charset="-78"/>
                 <a:cs typeface="Amiri" pitchFamily="2" charset="-78"/>
               </a:rPr>
               <a:t>أَسْتَيْقِظُ فِي السَّادِسَةِ، وَبَعْدَ أَنْ أَتَوَضَّأَ وَأُصَلِّيَ الفَجْرَ أَسْتَعِدُّ لِلْمَدْرَسَةِ، ثُمَّ أَخْرُجُ مِنَ البَيْتِ فِي السَّابِعَةِ وَالنِّصْفِ.</a:t>
@@ -14190,6 +14303,7 @@
                   <a:srgbClr val="1B3B6F"/>
                 </a:solidFill>
                 <a:latin typeface="Amiri" pitchFamily="2" charset="-78"/>
+                <a:ea typeface="Amiri" pitchFamily="2" charset="-78"/>
                 <a:cs typeface="Amiri" pitchFamily="2" charset="-78"/>
               </a:rPr>
               <a:t>صِفْ لَنَا يَوْمًا عَادِيًّا فِي حَيَاتِكَ.</a:t>
@@ -14293,6 +14407,7 @@
                   <a:srgbClr val="1B3B6F"/>
                 </a:solidFill>
                 <a:latin typeface="Amiri" pitchFamily="2" charset="-78"/>
+                <a:ea typeface="Amiri" pitchFamily="2" charset="-78"/>
                 <a:cs typeface="Amiri" pitchFamily="2" charset="-78"/>
               </a:rPr>
               <a:t>فِي أَيَّامِ الدِّرَاسَةِ يَكُونُ يَوْمِي مُنَظَّمًا وَسَرِيعًا، أَمَّا فِي العُطْلَةِ فَأَسْتَيْقِظُ مُتَأَخِّرًا وَأَقْضِي وَقْتًا أَطْوَلَ مَعَ أُسْرَتِي.</a:t>
@@ -14369,6 +14484,7 @@
                   <a:srgbClr val="1B3B6F"/>
                 </a:solidFill>
                 <a:latin typeface="Amiri" pitchFamily="2" charset="-78"/>
+                <a:ea typeface="Amiri" pitchFamily="2" charset="-78"/>
                 <a:cs typeface="Amiri" pitchFamily="2" charset="-78"/>
               </a:rPr>
               <a:t>مَا الفَرْقُ بَيْنَ أَيَّامِ الدِّرَاسَةِ وَالعُطْلَةِ؟</a:t>
@@ -14472,6 +14588,7 @@
                   <a:srgbClr val="1B3B6F"/>
                 </a:solidFill>
                 <a:latin typeface="Amiri" pitchFamily="2" charset="-78"/>
+                <a:ea typeface="Amiri" pitchFamily="2" charset="-78"/>
                 <a:cs typeface="Amiri" pitchFamily="2" charset="-78"/>
               </a:rPr>
               <a:t>أَمْسِ رَجَعْتُ إِلَى البَيْتِ مُتْعَبًا، فَأَخَذْتُ قَيْلُولَةً قَصِيرَةً، ثُمَّ رَاجَعْتُ دُرُوسِي سَاعَتَيْنِ.</a:t>
@@ -14548,6 +14665,7 @@
                   <a:srgbClr val="1B3B6F"/>
                 </a:solidFill>
                 <a:latin typeface="Amiri" pitchFamily="2" charset="-78"/>
+                <a:ea typeface="Amiri" pitchFamily="2" charset="-78"/>
                 <a:cs typeface="Amiri" pitchFamily="2" charset="-78"/>
               </a:rPr>
               <a:t>مَاذَا فَعَلْتَ أَمْسِ بَعْدَ المَدْرَسَةِ؟</a:t>
@@ -14651,6 +14769,7 @@
                   <a:srgbClr val="1B3B6F"/>
                 </a:solidFill>
                 <a:latin typeface="Amiri" pitchFamily="2" charset="-78"/>
+                <a:ea typeface="Amiri" pitchFamily="2" charset="-78"/>
                 <a:cs typeface="Amiri" pitchFamily="2" charset="-78"/>
               </a:rPr>
               <a:t>أَعْتَقِدُ أَنَّهُ صِحِّيٌّ إِلَى حَدٍّ مَا، لِأَنِّي أَتَنَاوَلُ الإِفْطَارَ كُلَّ يَوْمٍ، لٰكِنَّنِي أَنَامُ مُتَأَخِّرًا أَحْيَانًا.</a:t>
@@ -14727,6 +14846,7 @@
                   <a:srgbClr val="1B3B6F"/>
                 </a:solidFill>
                 <a:latin typeface="Amiri" pitchFamily="2" charset="-78"/>
+                <a:ea typeface="Amiri" pitchFamily="2" charset="-78"/>
                 <a:cs typeface="Amiri" pitchFamily="2" charset="-78"/>
               </a:rPr>
               <a:t>هَلْ رُوتِينُكَ صِحِّيٌّ فِي رَأْيِكَ؟ لِمَاذَا؟</a:t>
@@ -14830,6 +14950,7 @@
                   <a:srgbClr val="1B3B6F"/>
                 </a:solidFill>
                 <a:latin typeface="Amiri" pitchFamily="2" charset="-78"/>
+                <a:ea typeface="Amiri" pitchFamily="2" charset="-78"/>
                 <a:cs typeface="Amiri" pitchFamily="2" charset="-78"/>
               </a:rPr>
               <a:t>سَأُحَاوِلُ أَنْ أَنَامَ مُبَكِّرًا، وَسَأَسْتَعْمِلُ هَاتِفِي أَقَلَّ فِي اللَّيْلِ.</a:t>
@@ -14906,6 +15027,7 @@
                   <a:srgbClr val="1B3B6F"/>
                 </a:solidFill>
                 <a:latin typeface="Amiri" pitchFamily="2" charset="-78"/>
+                <a:ea typeface="Amiri" pitchFamily="2" charset="-78"/>
                 <a:cs typeface="Amiri" pitchFamily="2" charset="-78"/>
               </a:rPr>
               <a:t>مَاذَا سَتُغَيِّرُ فِي رُوتِينِكَ فِي المُسْتَقْبَلِ؟</a:t>
@@ -15115,6 +15237,7 @@
                   <a:srgbClr val="D4AF37"/>
                 </a:solidFill>
                 <a:latin typeface="Amiri" pitchFamily="2" charset="-78"/>
+                <a:ea typeface="Amiri" pitchFamily="2" charset="-78"/>
                 <a:cs typeface="Amiri" pitchFamily="2" charset="-78"/>
               </a:rPr>
               <a:t>م</a:t>
@@ -15435,6 +15558,7 @@
                   <a:srgbClr val="8A6D1E"/>
                 </a:solidFill>
                 <a:latin typeface="Amiri" pitchFamily="2" charset="-78"/>
+                <a:ea typeface="Amiri" pitchFamily="2" charset="-78"/>
                 <a:cs typeface="Amiri" pitchFamily="2" charset="-78"/>
               </a:rPr>
               <a:t>يَوْمِي</a:t>
@@ -15715,6 +15839,7 @@
                   <a:srgbClr val="1B3B6F"/>
                 </a:solidFill>
                 <a:latin typeface="Amiri" pitchFamily="2" charset="-78"/>
+                <a:ea typeface="Amiri" pitchFamily="2" charset="-78"/>
                 <a:cs typeface="Amiri" pitchFamily="2" charset="-78"/>
               </a:rPr>
               <a:t>أَسْتَيْقِظُ فِي …</a:t>
@@ -15791,6 +15916,7 @@
                   <a:srgbClr val="1B3B6F"/>
                 </a:solidFill>
                 <a:latin typeface="Amiri" pitchFamily="2" charset="-78"/>
+                <a:ea typeface="Amiri" pitchFamily="2" charset="-78"/>
                 <a:cs typeface="Amiri" pitchFamily="2" charset="-78"/>
               </a:rPr>
               <a:t>فِي أَيِّ سَاعَةٍ تَسْتَيْقِظُ؟</a:t>
@@ -15959,6 +16085,7 @@
                   <a:srgbClr val="1B3B6F"/>
                 </a:solidFill>
                 <a:latin typeface="Amiri" pitchFamily="2" charset="-78"/>
+                <a:ea typeface="Amiri" pitchFamily="2" charset="-78"/>
                 <a:cs typeface="Amiri" pitchFamily="2" charset="-78"/>
               </a:rPr>
               <a:t>أَتَنَاوَلُ …</a:t>
@@ -16035,6 +16162,7 @@
                   <a:srgbClr val="1B3B6F"/>
                 </a:solidFill>
                 <a:latin typeface="Amiri" pitchFamily="2" charset="-78"/>
+                <a:ea typeface="Amiri" pitchFamily="2" charset="-78"/>
                 <a:cs typeface="Amiri" pitchFamily="2" charset="-78"/>
               </a:rPr>
               <a:t>مَاذَا تَتَنَاوَلُ فِي الإِفْطَارِ؟</a:t>
@@ -16203,6 +16331,7 @@
                   <a:srgbClr val="1B3B6F"/>
                 </a:solidFill>
                 <a:latin typeface="Amiri" pitchFamily="2" charset="-78"/>
+                <a:ea typeface="Amiri" pitchFamily="2" charset="-78"/>
                 <a:cs typeface="Amiri" pitchFamily="2" charset="-78"/>
               </a:rPr>
               <a:t>أَذْهَبُ بِالسَّيَّارَةِ / أَمْشِي</a:t>
@@ -16279,6 +16408,7 @@
                   <a:srgbClr val="1B3B6F"/>
                 </a:solidFill>
                 <a:latin typeface="Amiri" pitchFamily="2" charset="-78"/>
+                <a:ea typeface="Amiri" pitchFamily="2" charset="-78"/>
                 <a:cs typeface="Amiri" pitchFamily="2" charset="-78"/>
               </a:rPr>
               <a:t>كَيْفَ تَذْهَبُ إِلَى المَدْرَسَةِ؟</a:t>
@@ -16447,6 +16577,7 @@
                   <a:srgbClr val="1B3B6F"/>
                 </a:solidFill>
                 <a:latin typeface="Amiri" pitchFamily="2" charset="-78"/>
+                <a:ea typeface="Amiri" pitchFamily="2" charset="-78"/>
                 <a:cs typeface="Amiri" pitchFamily="2" charset="-78"/>
               </a:rPr>
               <a:t>فِي المَسَاءِ أَ…</a:t>
@@ -16523,6 +16654,7 @@
                   <a:srgbClr val="1B3B6F"/>
                 </a:solidFill>
                 <a:latin typeface="Amiri" pitchFamily="2" charset="-78"/>
+                <a:ea typeface="Amiri" pitchFamily="2" charset="-78"/>
                 <a:cs typeface="Amiri" pitchFamily="2" charset="-78"/>
               </a:rPr>
               <a:t>مَاذَا تَفْعَلُ فِي المَسَاءِ؟</a:t>
@@ -16691,6 +16823,7 @@
                   <a:srgbClr val="1B3B6F"/>
                 </a:solidFill>
                 <a:latin typeface="Amiri" pitchFamily="2" charset="-78"/>
+                <a:ea typeface="Amiri" pitchFamily="2" charset="-78"/>
                 <a:cs typeface="Amiri" pitchFamily="2" charset="-78"/>
               </a:rPr>
               <a:t>أَنَامُ فِي …</a:t>
@@ -16767,6 +16900,7 @@
                   <a:srgbClr val="1B3B6F"/>
                 </a:solidFill>
                 <a:latin typeface="Amiri" pitchFamily="2" charset="-78"/>
+                <a:ea typeface="Amiri" pitchFamily="2" charset="-78"/>
                 <a:cs typeface="Amiri" pitchFamily="2" charset="-78"/>
               </a:rPr>
               <a:t>مَتَى تَنَامُ؟</a:t>
@@ -16921,6 +17055,7 @@
                   <a:srgbClr val="1B3B6F"/>
                 </a:solidFill>
                 <a:latin typeface="Amiri" pitchFamily="2" charset="-78"/>
+                <a:ea typeface="Amiri" pitchFamily="2" charset="-78"/>
                 <a:cs typeface="Amiri" pitchFamily="2" charset="-78"/>
               </a:rPr>
               <a:t>عَفْوًا، هَلْ يُمْكِنُ أَنْ تُعِيدَ السُّؤَالَ؟</a:t>
@@ -17054,6 +17189,7 @@
                   <a:srgbClr val="D4AF37"/>
                 </a:solidFill>
                 <a:latin typeface="Amiri" pitchFamily="2" charset="-78"/>
+                <a:ea typeface="Amiri" pitchFamily="2" charset="-78"/>
                 <a:cs typeface="Amiri" pitchFamily="2" charset="-78"/>
               </a:rPr>
               <a:t>م</a:t>
@@ -17374,6 +17510,7 @@
                   <a:srgbClr val="8A6D1E"/>
                 </a:solidFill>
                 <a:latin typeface="Amiri" pitchFamily="2" charset="-78"/>
+                <a:ea typeface="Amiri" pitchFamily="2" charset="-78"/>
                 <a:cs typeface="Amiri" pitchFamily="2" charset="-78"/>
               </a:rPr>
               <a:t>رُوتِينِي</a:t>
@@ -17654,6 +17791,7 @@
                   <a:srgbClr val="1B3B6F"/>
                 </a:solidFill>
                 <a:latin typeface="Amiri" pitchFamily="2" charset="-78"/>
+                <a:ea typeface="Amiri" pitchFamily="2" charset="-78"/>
                 <a:cs typeface="Amiri" pitchFamily="2" charset="-78"/>
               </a:rPr>
               <a:t>أَوَّلًا … ثُمَّ … وَأَخِيرًا …</a:t>
@@ -17730,6 +17868,7 @@
                   <a:srgbClr val="1B3B6F"/>
                 </a:solidFill>
                 <a:latin typeface="Amiri" pitchFamily="2" charset="-78"/>
+                <a:ea typeface="Amiri" pitchFamily="2" charset="-78"/>
                 <a:cs typeface="Amiri" pitchFamily="2" charset="-78"/>
               </a:rPr>
               <a:t>صِفْ رُوتِينَكَ الصَّبَاحِيَّ بِالتَّرْتِيبِ.</a:t>
@@ -17833,6 +17972,7 @@
                   <a:srgbClr val="1B3B6F"/>
                 </a:solidFill>
                 <a:latin typeface="Amiri" pitchFamily="2" charset="-78"/>
+                <a:ea typeface="Amiri" pitchFamily="2" charset="-78"/>
                 <a:cs typeface="Amiri" pitchFamily="2" charset="-78"/>
               </a:rPr>
               <a:t>نَعَمْ، فِي نِهَايَةِ الأُسْبُوعِ …</a:t>
@@ -17909,6 +18049,7 @@
                   <a:srgbClr val="1B3B6F"/>
                 </a:solidFill>
                 <a:latin typeface="Amiri" pitchFamily="2" charset="-78"/>
+                <a:ea typeface="Amiri" pitchFamily="2" charset="-78"/>
                 <a:cs typeface="Amiri" pitchFamily="2" charset="-78"/>
               </a:rPr>
               <a:t>هَلْ يَخْتَلِفُ يَوْمُكَ فِي نِهَايَةِ الأُسْبُوعِ؟</a:t>
@@ -18012,6 +18153,7 @@
                   <a:srgbClr val="1B3B6F"/>
                 </a:solidFill>
                 <a:latin typeface="Amiri" pitchFamily="2" charset="-78"/>
+                <a:ea typeface="Amiri" pitchFamily="2" charset="-78"/>
                 <a:cs typeface="Amiri" pitchFamily="2" charset="-78"/>
               </a:rPr>
               <a:t>يَسْتَيْقِظُ / تَسْتَيْقِظُ … أَوَّلًا</a:t>
@@ -18088,6 +18230,7 @@
                   <a:srgbClr val="1B3B6F"/>
                 </a:solidFill>
                 <a:latin typeface="Amiri" pitchFamily="2" charset="-78"/>
+                <a:ea typeface="Amiri" pitchFamily="2" charset="-78"/>
                 <a:cs typeface="Amiri" pitchFamily="2" charset="-78"/>
               </a:rPr>
               <a:t>مَنْ يَسْتَيْقِظُ أَوَّلًا فِي بَيْتِكَ؟</a:t>
@@ -18191,6 +18334,7 @@
                   <a:srgbClr val="1B3B6F"/>
                 </a:solidFill>
                 <a:latin typeface="Amiri" pitchFamily="2" charset="-78"/>
+                <a:ea typeface="Amiri" pitchFamily="2" charset="-78"/>
                 <a:cs typeface="Amiri" pitchFamily="2" charset="-78"/>
               </a:rPr>
               <a:t>أُحِبُّ … لِأَنَّ …</a:t>
@@ -18267,6 +18411,7 @@
                   <a:srgbClr val="1B3B6F"/>
                 </a:solidFill>
                 <a:latin typeface="Amiri" pitchFamily="2" charset="-78"/>
+                <a:ea typeface="Amiri" pitchFamily="2" charset="-78"/>
                 <a:cs typeface="Amiri" pitchFamily="2" charset="-78"/>
               </a:rPr>
               <a:t>مَا الجُزْءُ المُفَضَّلُ مِنْ يَوْمِكَ؟ لِمَاذَا؟</a:t>
@@ -18370,6 +18515,7 @@
                   <a:srgbClr val="1B3B6F"/>
                 </a:solidFill>
                 <a:latin typeface="Amiri" pitchFamily="2" charset="-78"/>
+                <a:ea typeface="Amiri" pitchFamily="2" charset="-78"/>
                 <a:cs typeface="Amiri" pitchFamily="2" charset="-78"/>
               </a:rPr>
               <a:t>أَمْسِ اسْتَيْقَظْتُ …</a:t>
@@ -18446,6 +18592,7 @@
                   <a:srgbClr val="1B3B6F"/>
                 </a:solidFill>
                 <a:latin typeface="Amiri" pitchFamily="2" charset="-78"/>
+                <a:ea typeface="Amiri" pitchFamily="2" charset="-78"/>
                 <a:cs typeface="Amiri" pitchFamily="2" charset="-78"/>
               </a:rPr>
               <a:t>مَاذَا فَعَلْتَ صَبَاحَ أَمْسِ؟</a:t>
@@ -18655,6 +18802,7 @@
                   <a:srgbClr val="D4AF37"/>
                 </a:solidFill>
                 <a:latin typeface="Amiri" pitchFamily="2" charset="-78"/>
+                <a:ea typeface="Amiri" pitchFamily="2" charset="-78"/>
                 <a:cs typeface="Amiri" pitchFamily="2" charset="-78"/>
               </a:rPr>
               <a:t>م</a:t>
@@ -18975,6 +19123,7 @@
                   <a:srgbClr val="8A6D1E"/>
                 </a:solidFill>
                 <a:latin typeface="Amiri" pitchFamily="2" charset="-78"/>
+                <a:ea typeface="Amiri" pitchFamily="2" charset="-78"/>
                 <a:cs typeface="Amiri" pitchFamily="2" charset="-78"/>
               </a:rPr>
               <a:t>تَنْظِيمُ الوَقْتِ</a:t>
@@ -19255,6 +19404,7 @@
                   <a:srgbClr val="1B3B6F"/>
                 </a:solidFill>
                 <a:latin typeface="Amiri" pitchFamily="2" charset="-78"/>
+                <a:ea typeface="Amiri" pitchFamily="2" charset="-78"/>
                 <a:cs typeface="Amiri" pitchFamily="2" charset="-78"/>
               </a:rPr>
               <a:t>بَيْنَمَا أَسْتَيْقِظُ … يَسْتَيْقِظُ أَخِي …</a:t>
@@ -19331,6 +19481,7 @@
                   <a:srgbClr val="1B3B6F"/>
                 </a:solidFill>
                 <a:latin typeface="Amiri" pitchFamily="2" charset="-78"/>
+                <a:ea typeface="Amiri" pitchFamily="2" charset="-78"/>
                 <a:cs typeface="Amiri" pitchFamily="2" charset="-78"/>
               </a:rPr>
               <a:t>قَارِنْ بَيْنَ رُوتِينِكَ وَرُوتِينِ شَخْصٍ آخَرَ فِي أُسْرَتِكَ.</a:t>
@@ -19434,6 +19585,7 @@
                   <a:srgbClr val="1B3B6F"/>
                 </a:solidFill>
                 <a:latin typeface="Amiri" pitchFamily="2" charset="-78"/>
+                <a:ea typeface="Amiri" pitchFamily="2" charset="-78"/>
                 <a:cs typeface="Amiri" pitchFamily="2" charset="-78"/>
               </a:rPr>
               <a:t>فِي رَأْيِي … لِأَنَّ …</a:t>
@@ -19510,6 +19662,7 @@
                   <a:srgbClr val="1B3B6F"/>
                 </a:solidFill>
                 <a:latin typeface="Amiri" pitchFamily="2" charset="-78"/>
+                <a:ea typeface="Amiri" pitchFamily="2" charset="-78"/>
                 <a:cs typeface="Amiri" pitchFamily="2" charset="-78"/>
               </a:rPr>
               <a:t>هَلْ يَنَامُ الطُّلَّابُ وَقْتًا كَافِيًا فِي رَأْيِكَ؟</a:t>
@@ -19613,6 +19766,7 @@
                   <a:srgbClr val="1B3B6F"/>
                 </a:solidFill>
                 <a:latin typeface="Amiri" pitchFamily="2" charset="-78"/>
+                <a:ea typeface="Amiri" pitchFamily="2" charset="-78"/>
                 <a:cs typeface="Amiri" pitchFamily="2" charset="-78"/>
               </a:rPr>
               <a:t>أَضَعُ جَدْوَلًا … وَأَحْرِصُ عَلَى …</a:t>
@@ -19689,6 +19843,7 @@
                   <a:srgbClr val="1B3B6F"/>
                 </a:solidFill>
                 <a:latin typeface="Amiri" pitchFamily="2" charset="-78"/>
+                <a:ea typeface="Amiri" pitchFamily="2" charset="-78"/>
                 <a:cs typeface="Amiri" pitchFamily="2" charset="-78"/>
               </a:rPr>
               <a:t>كَيْفَ تُنَظِّمُ وَقْتَكَ فِي أَيَّامِ الامْتِحَانَاتِ؟</a:t>
@@ -19792,6 +19947,7 @@
                   <a:srgbClr val="1B3B6F"/>
                 </a:solidFill>
                 <a:latin typeface="Amiri" pitchFamily="2" charset="-78"/>
+                <a:ea typeface="Amiri" pitchFamily="2" charset="-78"/>
                 <a:cs typeface="Amiri" pitchFamily="2" charset="-78"/>
               </a:rPr>
               <a:t>عِنْدَمَا كُنْتُ صَغِيرًا كُنْتُ …</a:t>
@@ -19868,6 +20024,7 @@
                   <a:srgbClr val="1B3B6F"/>
                 </a:solidFill>
                 <a:latin typeface="Amiri" pitchFamily="2" charset="-78"/>
+                <a:ea typeface="Amiri" pitchFamily="2" charset="-78"/>
                 <a:cs typeface="Amiri" pitchFamily="2" charset="-78"/>
               </a:rPr>
               <a:t>كَيْفَ كَانَ رُوتِينُكَ عِنْدَمَا كُنْتَ صَغِيرًا؟</a:t>
@@ -19971,6 +20128,7 @@
                   <a:srgbClr val="1B3B6F"/>
                 </a:solidFill>
                 <a:latin typeface="Amiri" pitchFamily="2" charset="-78"/>
+                <a:ea typeface="Amiri" pitchFamily="2" charset="-78"/>
                 <a:cs typeface="Amiri" pitchFamily="2" charset="-78"/>
               </a:rPr>
               <a:t>لَوْ كَانَ عِنْدِي يَوْمٌ حُرٌّ، لَزُرْتُ …</a:t>
@@ -20047,6 +20205,7 @@
                   <a:srgbClr val="1B3B6F"/>
                 </a:solidFill>
                 <a:latin typeface="Amiri" pitchFamily="2" charset="-78"/>
+                <a:ea typeface="Amiri" pitchFamily="2" charset="-78"/>
                 <a:cs typeface="Amiri" pitchFamily="2" charset="-78"/>
               </a:rPr>
               <a:t>لَوْ كَانَ عِنْدَكَ يَوْمٌ حُرٌّ تَمَامًا، كَيْفَ تَقْضِيهِ؟</a:t>
@@ -20256,6 +20415,7 @@
                   <a:srgbClr val="D4AF37"/>
                 </a:solidFill>
                 <a:latin typeface="Amiri" pitchFamily="2" charset="-78"/>
+                <a:ea typeface="Amiri" pitchFamily="2" charset="-78"/>
                 <a:cs typeface="Amiri" pitchFamily="2" charset="-78"/>
               </a:rPr>
               <a:t>م</a:t>
@@ -20576,6 +20736,7 @@
                   <a:srgbClr val="8A6D1E"/>
                 </a:solidFill>
                 <a:latin typeface="Amiri" pitchFamily="2" charset="-78"/>
+                <a:ea typeface="Amiri" pitchFamily="2" charset="-78"/>
                 <a:cs typeface="Amiri" pitchFamily="2" charset="-78"/>
               </a:rPr>
               <a:t>آدَابُ الصَّفِّ</a:t>
@@ -22107,6 +22268,7 @@
                   <a:srgbClr val="D4AF37"/>
                 </a:solidFill>
                 <a:latin typeface="Amiri" pitchFamily="2" charset="-78"/>
+                <a:ea typeface="Amiri" pitchFamily="2" charset="-78"/>
                 <a:cs typeface="Amiri" pitchFamily="2" charset="-78"/>
               </a:rPr>
               <a:t>م</a:t>
@@ -22427,6 +22589,7 @@
                   <a:srgbClr val="8A6D1E"/>
                 </a:solidFill>
                 <a:latin typeface="Amiri" pitchFamily="2" charset="-78"/>
+                <a:ea typeface="Amiri" pitchFamily="2" charset="-78"/>
                 <a:cs typeface="Amiri" pitchFamily="2" charset="-78"/>
               </a:rPr>
               <a:t>نَمُوذَجُ الإِجَابَةِ</a:t>
@@ -22669,6 +22832,7 @@
                   <a:srgbClr val="1B3B6F"/>
                 </a:solidFill>
                 <a:latin typeface="Amiri" pitchFamily="2" charset="-78"/>
+                <a:ea typeface="Amiri" pitchFamily="2" charset="-78"/>
                 <a:cs typeface="Amiri" pitchFamily="2" charset="-78"/>
               </a:rPr>
               <a:t>أَسْتَيْقِظُ فِي السَّاعَةِ السَّادِسَةِ وَالنِّصْفِ.</a:t>
@@ -22745,6 +22909,7 @@
                   <a:srgbClr val="1B3B6F"/>
                 </a:solidFill>
                 <a:latin typeface="Amiri" pitchFamily="2" charset="-78"/>
+                <a:ea typeface="Amiri" pitchFamily="2" charset="-78"/>
                 <a:cs typeface="Amiri" pitchFamily="2" charset="-78"/>
               </a:rPr>
               <a:t>فِي أَيِّ سَاعَةٍ تَسْتَيْقِظُ؟</a:t>
@@ -22848,6 +23013,7 @@
                   <a:srgbClr val="1B3B6F"/>
                 </a:solidFill>
                 <a:latin typeface="Amiri" pitchFamily="2" charset="-78"/>
+                <a:ea typeface="Amiri" pitchFamily="2" charset="-78"/>
                 <a:cs typeface="Amiri" pitchFamily="2" charset="-78"/>
               </a:rPr>
               <a:t>أَتَنَاوَلُ البَيْضَ وَالخُبْزَ عَادَةً.</a:t>
@@ -22924,6 +23090,7 @@
                   <a:srgbClr val="1B3B6F"/>
                 </a:solidFill>
                 <a:latin typeface="Amiri" pitchFamily="2" charset="-78"/>
+                <a:ea typeface="Amiri" pitchFamily="2" charset="-78"/>
                 <a:cs typeface="Amiri" pitchFamily="2" charset="-78"/>
               </a:rPr>
               <a:t>مَاذَا تَتَنَاوَلُ فِي الإِفْطَارِ؟</a:t>
@@ -23027,6 +23194,7 @@
                   <a:srgbClr val="1B3B6F"/>
                 </a:solidFill>
                 <a:latin typeface="Amiri" pitchFamily="2" charset="-78"/>
+                <a:ea typeface="Amiri" pitchFamily="2" charset="-78"/>
                 <a:cs typeface="Amiri" pitchFamily="2" charset="-78"/>
               </a:rPr>
               <a:t>أَذْهَبُ إِلَى المَدْرَسَةِ بِالسَّيَّارَةِ مَعَ أَبِي.</a:t>
@@ -23103,6 +23271,7 @@
                   <a:srgbClr val="1B3B6F"/>
                 </a:solidFill>
                 <a:latin typeface="Amiri" pitchFamily="2" charset="-78"/>
+                <a:ea typeface="Amiri" pitchFamily="2" charset="-78"/>
                 <a:cs typeface="Amiri" pitchFamily="2" charset="-78"/>
               </a:rPr>
               <a:t>كَيْفَ تَذْهَبُ إِلَى المَدْرَسَةِ؟</a:t>
@@ -23206,6 +23375,7 @@
                   <a:srgbClr val="1B3B6F"/>
                 </a:solidFill>
                 <a:latin typeface="Amiri" pitchFamily="2" charset="-78"/>
+                <a:ea typeface="Amiri" pitchFamily="2" charset="-78"/>
                 <a:cs typeface="Amiri" pitchFamily="2" charset="-78"/>
               </a:rPr>
               <a:t>فِي المَسَاءِ أَدْرُسُ ثُمَّ أُشَاهِدُ التِّلْفَازَ.</a:t>
@@ -23282,6 +23452,7 @@
                   <a:srgbClr val="1B3B6F"/>
                 </a:solidFill>
                 <a:latin typeface="Amiri" pitchFamily="2" charset="-78"/>
+                <a:ea typeface="Amiri" pitchFamily="2" charset="-78"/>
                 <a:cs typeface="Amiri" pitchFamily="2" charset="-78"/>
               </a:rPr>
               <a:t>مَاذَا تَفْعَلُ فِي المَسَاءِ؟</a:t>
@@ -23385,6 +23556,7 @@
                   <a:srgbClr val="1B3B6F"/>
                 </a:solidFill>
                 <a:latin typeface="Amiri" pitchFamily="2" charset="-78"/>
+                <a:ea typeface="Amiri" pitchFamily="2" charset="-78"/>
                 <a:cs typeface="Amiri" pitchFamily="2" charset="-78"/>
               </a:rPr>
               <a:t>أَنَامُ فِي السَّاعَةِ العَاشِرَةِ.</a:t>
@@ -23461,6 +23633,7 @@
                   <a:srgbClr val="1B3B6F"/>
                 </a:solidFill>
                 <a:latin typeface="Amiri" pitchFamily="2" charset="-78"/>
+                <a:ea typeface="Amiri" pitchFamily="2" charset="-78"/>
                 <a:cs typeface="Amiri" pitchFamily="2" charset="-78"/>
               </a:rPr>
               <a:t>مَتَى تَنَامُ؟</a:t>
@@ -23670,6 +23843,7 @@
                   <a:srgbClr val="D4AF37"/>
                 </a:solidFill>
                 <a:latin typeface="Amiri" pitchFamily="2" charset="-78"/>
+                <a:ea typeface="Amiri" pitchFamily="2" charset="-78"/>
                 <a:cs typeface="Amiri" pitchFamily="2" charset="-78"/>
               </a:rPr>
               <a:t>م</a:t>
@@ -23990,6 +24164,7 @@
                   <a:srgbClr val="8A6D1E"/>
                 </a:solidFill>
                 <a:latin typeface="Amiri" pitchFamily="2" charset="-78"/>
+                <a:ea typeface="Amiri" pitchFamily="2" charset="-78"/>
                 <a:cs typeface="Amiri" pitchFamily="2" charset="-78"/>
               </a:rPr>
               <a:t>نَمُوذَجُ الإِجَابَةِ</a:t>
@@ -24232,6 +24407,7 @@
                   <a:srgbClr val="1B3B6F"/>
                 </a:solidFill>
                 <a:latin typeface="Amiri" pitchFamily="2" charset="-78"/>
+                <a:ea typeface="Amiri" pitchFamily="2" charset="-78"/>
                 <a:cs typeface="Amiri" pitchFamily="2" charset="-78"/>
               </a:rPr>
               <a:t>أَوَّلًا أَسْتَيْقِظُ فِي السَّادِسَةِ، ثُمَّ أُنَظِّفُ أَسْنَانِي وَأَرْتَدِي مَلَابِسِي، وَأَخِيرًا أَتَنَاوَلُ الإِفْطَارَ مَعَ أُسْرَتِي.</a:t>
@@ -24308,6 +24484,7 @@
                   <a:srgbClr val="1B3B6F"/>
                 </a:solidFill>
                 <a:latin typeface="Amiri" pitchFamily="2" charset="-78"/>
+                <a:ea typeface="Amiri" pitchFamily="2" charset="-78"/>
                 <a:cs typeface="Amiri" pitchFamily="2" charset="-78"/>
               </a:rPr>
               <a:t>صِفْ رُوتِينَكَ الصَّبَاحِيَّ بِالتَّرْتِيبِ.</a:t>
@@ -24411,6 +24588,7 @@
                   <a:srgbClr val="1B3B6F"/>
                 </a:solidFill>
                 <a:latin typeface="Amiri" pitchFamily="2" charset="-78"/>
+                <a:ea typeface="Amiri" pitchFamily="2" charset="-78"/>
                 <a:cs typeface="Amiri" pitchFamily="2" charset="-78"/>
               </a:rPr>
               <a:t>نَعَمْ، فِي نِهَايَةِ الأُسْبُوعِ أَسْتَيْقِظُ مُتَأَخِّرًا، وَأَلْعَبُ كُرَةَ القَدَمِ مَعَ أَصْدِقَائِي.</a:t>
@@ -24487,6 +24665,7 @@
                   <a:srgbClr val="1B3B6F"/>
                 </a:solidFill>
                 <a:latin typeface="Amiri" pitchFamily="2" charset="-78"/>
+                <a:ea typeface="Amiri" pitchFamily="2" charset="-78"/>
                 <a:cs typeface="Amiri" pitchFamily="2" charset="-78"/>
               </a:rPr>
               <a:t>هَلْ يَخْتَلِفُ يَوْمُكَ فِي نِهَايَةِ الأُسْبُوعِ؟</a:t>
@@ -24590,6 +24769,7 @@
                   <a:srgbClr val="1B3B6F"/>
                 </a:solidFill>
                 <a:latin typeface="Amiri" pitchFamily="2" charset="-78"/>
+                <a:ea typeface="Amiri" pitchFamily="2" charset="-78"/>
                 <a:cs typeface="Amiri" pitchFamily="2" charset="-78"/>
               </a:rPr>
               <a:t>تَسْتَيْقِظُ أُمِّي أَوَّلًا، لِأَنَّهَا تُحَضِّرُ الإِفْطَارَ لَنَا.</a:t>
@@ -24666,6 +24846,7 @@
                   <a:srgbClr val="1B3B6F"/>
                 </a:solidFill>
                 <a:latin typeface="Amiri" pitchFamily="2" charset="-78"/>
+                <a:ea typeface="Amiri" pitchFamily="2" charset="-78"/>
                 <a:cs typeface="Amiri" pitchFamily="2" charset="-78"/>
               </a:rPr>
               <a:t>مَنْ يَسْتَيْقِظُ أَوَّلًا فِي بَيْتِكَ؟</a:t>
@@ -24769,6 +24950,7 @@
                   <a:srgbClr val="1B3B6F"/>
                 </a:solidFill>
                 <a:latin typeface="Amiri" pitchFamily="2" charset="-78"/>
+                <a:ea typeface="Amiri" pitchFamily="2" charset="-78"/>
                 <a:cs typeface="Amiri" pitchFamily="2" charset="-78"/>
               </a:rPr>
               <a:t>أُحِبُّ المَسَاءَ كَثِيرًا، لِأَنَّنِي أَرْتَاحُ وَأَقْرَأُ كِتَابًا.</a:t>
@@ -24845,6 +25027,7 @@
                   <a:srgbClr val="1B3B6F"/>
                 </a:solidFill>
                 <a:latin typeface="Amiri" pitchFamily="2" charset="-78"/>
+                <a:ea typeface="Amiri" pitchFamily="2" charset="-78"/>
                 <a:cs typeface="Amiri" pitchFamily="2" charset="-78"/>
               </a:rPr>
               <a:t>مَا الجُزْءُ المُفَضَّلُ مِنْ يَوْمِكَ؟ لِمَاذَا؟</a:t>
@@ -24948,6 +25131,7 @@
                   <a:srgbClr val="1B3B6F"/>
                 </a:solidFill>
                 <a:latin typeface="Amiri" pitchFamily="2" charset="-78"/>
+                <a:ea typeface="Amiri" pitchFamily="2" charset="-78"/>
                 <a:cs typeface="Amiri" pitchFamily="2" charset="-78"/>
               </a:rPr>
               <a:t>أَمْسِ اسْتَيْقَظْتُ مُتَأَخِّرًا، فَخَرَجْتُ مِنَ البَيْتِ بِسُرْعَةٍ.</a:t>
@@ -25024,6 +25208,7 @@
                   <a:srgbClr val="1B3B6F"/>
                 </a:solidFill>
                 <a:latin typeface="Amiri" pitchFamily="2" charset="-78"/>
+                <a:ea typeface="Amiri" pitchFamily="2" charset="-78"/>
                 <a:cs typeface="Amiri" pitchFamily="2" charset="-78"/>
               </a:rPr>
               <a:t>مَاذَا فَعَلْتَ صَبَاحَ أَمْسِ؟</a:t>
@@ -25233,6 +25418,7 @@
                   <a:srgbClr val="D4AF37"/>
                 </a:solidFill>
                 <a:latin typeface="Amiri" pitchFamily="2" charset="-78"/>
+                <a:ea typeface="Amiri" pitchFamily="2" charset="-78"/>
                 <a:cs typeface="Amiri" pitchFamily="2" charset="-78"/>
               </a:rPr>
               <a:t>م</a:t>
@@ -25553,6 +25739,7 @@
                   <a:srgbClr val="8A6D1E"/>
                 </a:solidFill>
                 <a:latin typeface="Amiri" pitchFamily="2" charset="-78"/>
+                <a:ea typeface="Amiri" pitchFamily="2" charset="-78"/>
                 <a:cs typeface="Amiri" pitchFamily="2" charset="-78"/>
               </a:rPr>
               <a:t>نَمُوذَجُ الإِجَابَةِ</a:t>
@@ -25795,6 +25982,7 @@
                   <a:srgbClr val="1B3B6F"/>
                 </a:solidFill>
                 <a:latin typeface="Amiri" pitchFamily="2" charset="-78"/>
+                <a:ea typeface="Amiri" pitchFamily="2" charset="-78"/>
                 <a:cs typeface="Amiri" pitchFamily="2" charset="-78"/>
               </a:rPr>
               <a:t>بَيْنَمَا أَسْتَيْقِظُ فِي السَّادِسَةِ، يَسْتَيْقِظُ أَخِي الكَبِيرُ فِي الخَامِسَةِ، لِأَنَّهُ يَعْمَلُ فِي مُسْتَشْفًى بَعِيدٍ.</a:t>
@@ -25871,6 +26059,7 @@
                   <a:srgbClr val="1B3B6F"/>
                 </a:solidFill>
                 <a:latin typeface="Amiri" pitchFamily="2" charset="-78"/>
+                <a:ea typeface="Amiri" pitchFamily="2" charset="-78"/>
                 <a:cs typeface="Amiri" pitchFamily="2" charset="-78"/>
               </a:rPr>
               <a:t>قَارِنْ بَيْنَ رُوتِينِكَ وَرُوتِينِ شَخْصٍ آخَرَ فِي أُسْرَتِكَ.</a:t>
@@ -25974,6 +26163,7 @@
                   <a:srgbClr val="1B3B6F"/>
                 </a:solidFill>
                 <a:latin typeface="Amiri" pitchFamily="2" charset="-78"/>
+                <a:ea typeface="Amiri" pitchFamily="2" charset="-78"/>
                 <a:cs typeface="Amiri" pitchFamily="2" charset="-78"/>
               </a:rPr>
               <a:t>فِي رَأْيِي لَا يَنَامُ كَثِيرٌ مِنَ الطُّلَّابِ وَقْتًا كَافِيًا، لِأَنَّهُمْ يَسْتَعْمِلُونَ الهَاتِفَ حَتَّى وَقْتٍ مُتَأَخِّرٍ.</a:t>
@@ -26050,6 +26240,7 @@
                   <a:srgbClr val="1B3B6F"/>
                 </a:solidFill>
                 <a:latin typeface="Amiri" pitchFamily="2" charset="-78"/>
+                <a:ea typeface="Amiri" pitchFamily="2" charset="-78"/>
                 <a:cs typeface="Amiri" pitchFamily="2" charset="-78"/>
               </a:rPr>
               <a:t>هَلْ يَنَامُ الطُّلَّابُ وَقْتًا كَافِيًا فِي رَأْيِكَ؟</a:t>
@@ -26153,6 +26344,7 @@
                   <a:srgbClr val="1B3B6F"/>
                 </a:solidFill>
                 <a:latin typeface="Amiri" pitchFamily="2" charset="-78"/>
+                <a:ea typeface="Amiri" pitchFamily="2" charset="-78"/>
                 <a:cs typeface="Amiri" pitchFamily="2" charset="-78"/>
               </a:rPr>
               <a:t>أَضَعُ جَدْوَلًا لِلْمُرَاجَعَةِ، وَأَدْرُسُ سَاعَةً ثُمَّ أَرْتَاحُ عَشْرَ دَقَائِقَ، وَأَحْرِصُ عَلَى النَّوْمِ مُبَكِّرًا.</a:t>
@@ -26229,6 +26421,7 @@
                   <a:srgbClr val="1B3B6F"/>
                 </a:solidFill>
                 <a:latin typeface="Amiri" pitchFamily="2" charset="-78"/>
+                <a:ea typeface="Amiri" pitchFamily="2" charset="-78"/>
                 <a:cs typeface="Amiri" pitchFamily="2" charset="-78"/>
               </a:rPr>
               <a:t>كَيْفَ تُنَظِّمُ وَقْتَكَ فِي أَيَّامِ الامْتِحَانَاتِ؟</a:t>
@@ -26438,6 +26631,7 @@
                   <a:srgbClr val="D4AF37"/>
                 </a:solidFill>
                 <a:latin typeface="Amiri" pitchFamily="2" charset="-78"/>
+                <a:ea typeface="Amiri" pitchFamily="2" charset="-78"/>
                 <a:cs typeface="Amiri" pitchFamily="2" charset="-78"/>
               </a:rPr>
               <a:t>م</a:t>
@@ -26758,6 +26952,7 @@
                   <a:srgbClr val="8A6D1E"/>
                 </a:solidFill>
                 <a:latin typeface="Amiri" pitchFamily="2" charset="-78"/>
+                <a:ea typeface="Amiri" pitchFamily="2" charset="-78"/>
                 <a:cs typeface="Amiri" pitchFamily="2" charset="-78"/>
               </a:rPr>
               <a:t>نَمُوذَجُ الإِجَابَةِ</a:t>
@@ -27000,6 +27195,7 @@
                   <a:srgbClr val="1B3B6F"/>
                 </a:solidFill>
                 <a:latin typeface="Amiri" pitchFamily="2" charset="-78"/>
+                <a:ea typeface="Amiri" pitchFamily="2" charset="-78"/>
                 <a:cs typeface="Amiri" pitchFamily="2" charset="-78"/>
               </a:rPr>
               <a:t>عِنْدَمَا كُنْتُ صَغِيرًا كُنْتُ أَنَامُ مُبَكِّرًا جِدًّا، وَكَانَتْ أُمِّي تُوقِظُنِي كُلَّ صَبَاحٍ.</a:t>
@@ -27076,6 +27272,7 @@
                   <a:srgbClr val="1B3B6F"/>
                 </a:solidFill>
                 <a:latin typeface="Amiri" pitchFamily="2" charset="-78"/>
+                <a:ea typeface="Amiri" pitchFamily="2" charset="-78"/>
                 <a:cs typeface="Amiri" pitchFamily="2" charset="-78"/>
               </a:rPr>
               <a:t>كَيْفَ كَانَ رُوتِينُكَ عِنْدَمَا كُنْتَ صَغِيرًا؟</a:t>
@@ -27179,6 +27376,7 @@
                   <a:srgbClr val="1B3B6F"/>
                 </a:solidFill>
                 <a:latin typeface="Amiri" pitchFamily="2" charset="-78"/>
+                <a:ea typeface="Amiri" pitchFamily="2" charset="-78"/>
                 <a:cs typeface="Amiri" pitchFamily="2" charset="-78"/>
               </a:rPr>
               <a:t>لَوْ كَانَ عِنْدِي يَوْمٌ حُرٌّ، لَزُرْتُ جَدَّتِي فِي الصَّبَاحِ، وَلَلَعِبْتُ مَعَ أَصْدِقَائِي فِي المَسَاءِ.</a:t>
@@ -27255,6 +27453,7 @@
                   <a:srgbClr val="1B3B6F"/>
                 </a:solidFill>
                 <a:latin typeface="Amiri" pitchFamily="2" charset="-78"/>
+                <a:ea typeface="Amiri" pitchFamily="2" charset="-78"/>
                 <a:cs typeface="Amiri" pitchFamily="2" charset="-78"/>
               </a:rPr>
               <a:t>لَوْ كَانَ عِنْدَكَ يَوْمٌ حُرٌّ تَمَامًا، كَيْفَ تَقْضِيهِ؟</a:t>
@@ -27464,6 +27663,7 @@
                   <a:srgbClr val="D4AF37"/>
                 </a:solidFill>
                 <a:latin typeface="Amiri" pitchFamily="2" charset="-78"/>
+                <a:ea typeface="Amiri" pitchFamily="2" charset="-78"/>
                 <a:cs typeface="Amiri" pitchFamily="2" charset="-78"/>
               </a:rPr>
               <a:t>م</a:t>
@@ -27784,6 +27984,7 @@
                   <a:srgbClr val="8A6D1E"/>
                 </a:solidFill>
                 <a:latin typeface="Amiri" pitchFamily="2" charset="-78"/>
+                <a:ea typeface="Amiri" pitchFamily="2" charset="-78"/>
                 <a:cs typeface="Amiri" pitchFamily="2" charset="-78"/>
               </a:rPr>
               <a:t>قَيِّمْ عَمَلَكَ</a:t>
@@ -28094,6 +28295,7 @@
                   <a:srgbClr val="1F2A37"/>
                 </a:solidFill>
                 <a:latin typeface="Amiri" pitchFamily="2" charset="-78"/>
+                <a:ea typeface="Amiri" pitchFamily="2" charset="-78"/>
                 <a:cs typeface="Amiri" pitchFamily="2" charset="-78"/>
               </a:rPr>
               <a:t>أَسْتَيْقِظُ</a:t>
@@ -28120,6 +28322,7 @@
                   <a:srgbClr val="1F2A37"/>
                 </a:solidFill>
                 <a:latin typeface="Amiri" pitchFamily="2" charset="-78"/>
+                <a:ea typeface="Amiri" pitchFamily="2" charset="-78"/>
                 <a:cs typeface="Amiri" pitchFamily="2" charset="-78"/>
               </a:rPr>
               <a:t>أَتَنَاوَلُ</a:t>
@@ -29080,6 +29283,7 @@
                   <a:srgbClr val="FFFFFF"/>
                 </a:solidFill>
                 <a:latin typeface="Amiri" pitchFamily="2" charset="-78"/>
+                <a:ea typeface="Amiri" pitchFamily="2" charset="-78"/>
                 <a:cs typeface="Amiri" pitchFamily="2" charset="-78"/>
               </a:rPr>
               <a:t>أَحْسَنْتُمْ! إِلَى اللِّقَاءِ</a:t>
@@ -29232,6 +29436,7 @@
                   <a:srgbClr val="D4AF37"/>
                 </a:solidFill>
                 <a:latin typeface="Amiri" pitchFamily="2" charset="-78"/>
+                <a:ea typeface="Amiri" pitchFamily="2" charset="-78"/>
                 <a:cs typeface="Amiri" pitchFamily="2" charset="-78"/>
               </a:rPr>
               <a:t>وَرْشَةُ الكِتَابَةِ</a:t>
@@ -29365,6 +29570,7 @@
                   <a:srgbClr val="D4AF37"/>
                 </a:solidFill>
                 <a:latin typeface="Amiri" pitchFamily="2" charset="-78"/>
+                <a:ea typeface="Amiri" pitchFamily="2" charset="-78"/>
                 <a:cs typeface="Amiri" pitchFamily="2" charset="-78"/>
               </a:rPr>
               <a:t>م</a:t>
@@ -29685,6 +29891,7 @@
                   <a:srgbClr val="8A6D1E"/>
                 </a:solidFill>
                 <a:latin typeface="Amiri" pitchFamily="2" charset="-78"/>
+                <a:ea typeface="Amiri" pitchFamily="2" charset="-78"/>
                 <a:cs typeface="Amiri" pitchFamily="2" charset="-78"/>
               </a:rPr>
               <a:t>خَرِيطَةُ الوَرْشَةِ</a:t>
@@ -29999,6 +30206,7 @@
                   <a:srgbClr val="1B3B6F"/>
                 </a:solidFill>
                 <a:latin typeface="Amiri" pitchFamily="2" charset="-78"/>
+                <a:ea typeface="Amiri" pitchFamily="2" charset="-78"/>
                 <a:cs typeface="Amiri" pitchFamily="2" charset="-78"/>
               </a:rPr>
               <a:t>كَيْفَ</a:t>
@@ -30275,6 +30483,7 @@
                   <a:srgbClr val="1E6B52"/>
                 </a:solidFill>
                 <a:latin typeface="Amiri" pitchFamily="2" charset="-78"/>
+                <a:ea typeface="Amiri" pitchFamily="2" charset="-78"/>
                 <a:cs typeface="Amiri" pitchFamily="2" charset="-78"/>
               </a:rPr>
               <a:t>تَمْثِيلُ الدَّوْرِ</a:t>
@@ -30551,6 +30760,7 @@
                   <a:srgbClr val="8A6D1E"/>
                 </a:solidFill>
                 <a:latin typeface="Amiri" pitchFamily="2" charset="-78"/>
+                <a:ea typeface="Amiri" pitchFamily="2" charset="-78"/>
                 <a:cs typeface="Amiri" pitchFamily="2" charset="-78"/>
               </a:rPr>
               <a:t>النَّمُوذَجُ</a:t>
@@ -30827,6 +31037,7 @@
                   <a:srgbClr val="1E6B52"/>
                 </a:solidFill>
                 <a:latin typeface="Amiri" pitchFamily="2" charset="-78"/>
+                <a:ea typeface="Amiri" pitchFamily="2" charset="-78"/>
                 <a:cs typeface="Amiri" pitchFamily="2" charset="-78"/>
               </a:rPr>
               <a:t>المُحَادَثَةُ</a:t>
@@ -31103,6 +31314,7 @@
                   <a:srgbClr val="8A6D1E"/>
                 </a:solidFill>
                 <a:latin typeface="Amiri" pitchFamily="2" charset="-78"/>
+                <a:ea typeface="Amiri" pitchFamily="2" charset="-78"/>
                 <a:cs typeface="Amiri" pitchFamily="2" charset="-78"/>
               </a:rPr>
               <a:t>قَيِّمْ</a:t>
@@ -31346,6 +31558,7 @@
                   <a:srgbClr val="D4AF37"/>
                 </a:solidFill>
                 <a:latin typeface="Amiri" pitchFamily="2" charset="-78"/>
+                <a:ea typeface="Amiri" pitchFamily="2" charset="-78"/>
                 <a:cs typeface="Amiri" pitchFamily="2" charset="-78"/>
               </a:rPr>
               <a:t>م</a:t>
@@ -31666,6 +31879,7 @@
                   <a:srgbClr val="8A6D1E"/>
                 </a:solidFill>
                 <a:latin typeface="Amiri" pitchFamily="2" charset="-78"/>
+                <a:ea typeface="Amiri" pitchFamily="2" charset="-78"/>
                 <a:cs typeface="Amiri" pitchFamily="2" charset="-78"/>
               </a:rPr>
               <a:t>امْتِحَانُ التَّحَدُّثِ</a:t>
@@ -32290,6 +32504,7 @@
                   <a:srgbClr val="1B3B6F"/>
                 </a:solidFill>
                 <a:latin typeface="Amiri" pitchFamily="2" charset="-78"/>
+                <a:ea typeface="Amiri" pitchFamily="2" charset="-78"/>
                 <a:cs typeface="Amiri" pitchFamily="2" charset="-78"/>
               </a:rPr>
               <a:t>عَفْوًا، هَلْ يُمْكِنُ أَنْ تُعِيدَ السُّؤَالَ؟</a:t>
@@ -32389,6 +32604,7 @@
                   <a:srgbClr val="1B3B6F"/>
                 </a:solidFill>
                 <a:latin typeface="Amiri" pitchFamily="2" charset="-78"/>
+                <a:ea typeface="Amiri" pitchFamily="2" charset="-78"/>
                 <a:cs typeface="Amiri" pitchFamily="2" charset="-78"/>
               </a:rPr>
               <a:t>لَحْظَةً، دَعْنِي أُفَكِّرُ …</a:t>
@@ -32488,6 +32704,7 @@
                   <a:srgbClr val="1B3B6F"/>
                 </a:solidFill>
                 <a:latin typeface="Amiri" pitchFamily="2" charset="-78"/>
+                <a:ea typeface="Amiri" pitchFamily="2" charset="-78"/>
                 <a:cs typeface="Amiri" pitchFamily="2" charset="-78"/>
               </a:rPr>
               <a:t>أَقْصِدُ …</a:t>
@@ -32659,6 +32876,7 @@
                   <a:srgbClr val="D4AF37"/>
                 </a:solidFill>
                 <a:latin typeface="Amiri" pitchFamily="2" charset="-78"/>
+                <a:ea typeface="Amiri" pitchFamily="2" charset="-78"/>
                 <a:cs typeface="Amiri" pitchFamily="2" charset="-78"/>
               </a:rPr>
               <a:t>م</a:t>
@@ -32979,6 +33197,7 @@
                   <a:srgbClr val="8A6D1E"/>
                 </a:solidFill>
                 <a:latin typeface="Amiri" pitchFamily="2" charset="-78"/>
+                <a:ea typeface="Amiri" pitchFamily="2" charset="-78"/>
                 <a:cs typeface="Amiri" pitchFamily="2" charset="-78"/>
               </a:rPr>
               <a:t>أَفْعَالُ الرُّوتِينِ</a:t>
@@ -33282,6 +33501,7 @@
                   <a:srgbClr val="1B3B6F"/>
                 </a:solidFill>
                 <a:latin typeface="Amiri" pitchFamily="2" charset="-78"/>
+                <a:ea typeface="Amiri" pitchFamily="2" charset="-78"/>
                 <a:cs typeface="Amiri" pitchFamily="2" charset="-78"/>
               </a:rPr>
               <a:t>أَسْتَيْقِظُ</a:t>
@@ -33439,6 +33659,7 @@
                   <a:srgbClr val="1B3B6F"/>
                 </a:solidFill>
                 <a:latin typeface="Amiri" pitchFamily="2" charset="-78"/>
+                <a:ea typeface="Amiri" pitchFamily="2" charset="-78"/>
                 <a:cs typeface="Amiri" pitchFamily="2" charset="-78"/>
               </a:rPr>
               <a:t>يَسْتَيْقِظُونَ</a:t>
@@ -33542,6 +33763,7 @@
                   <a:srgbClr val="1B3B6F"/>
                 </a:solidFill>
                 <a:latin typeface="Amiri" pitchFamily="2" charset="-78"/>
+                <a:ea typeface="Amiri" pitchFamily="2" charset="-78"/>
                 <a:cs typeface="Amiri" pitchFamily="2" charset="-78"/>
               </a:rPr>
               <a:t>تَسْتَيْقِظُ</a:t>
@@ -33645,6 +33867,7 @@
                   <a:srgbClr val="1B3B6F"/>
                 </a:solidFill>
                 <a:latin typeface="Amiri" pitchFamily="2" charset="-78"/>
+                <a:ea typeface="Amiri" pitchFamily="2" charset="-78"/>
                 <a:cs typeface="Amiri" pitchFamily="2" charset="-78"/>
               </a:rPr>
               <a:t>يَسْتَيْقِظُ</a:t>
@@ -33910,6 +34133,7 @@
                   <a:srgbClr val="1B3B6F"/>
                 </a:solidFill>
                 <a:latin typeface="Amiri" pitchFamily="2" charset="-78"/>
+                <a:ea typeface="Amiri" pitchFamily="2" charset="-78"/>
                 <a:cs typeface="Amiri" pitchFamily="2" charset="-78"/>
               </a:rPr>
               <a:t>أَتَنَاوَلُ</a:t>
@@ -34067,6 +34291,7 @@
                   <a:srgbClr val="1B3B6F"/>
                 </a:solidFill>
                 <a:latin typeface="Amiri" pitchFamily="2" charset="-78"/>
+                <a:ea typeface="Amiri" pitchFamily="2" charset="-78"/>
                 <a:cs typeface="Amiri" pitchFamily="2" charset="-78"/>
               </a:rPr>
               <a:t>يَتَنَاوَلُونَ</a:t>
@@ -34170,6 +34395,7 @@
                   <a:srgbClr val="1B3B6F"/>
                 </a:solidFill>
                 <a:latin typeface="Amiri" pitchFamily="2" charset="-78"/>
+                <a:ea typeface="Amiri" pitchFamily="2" charset="-78"/>
                 <a:cs typeface="Amiri" pitchFamily="2" charset="-78"/>
               </a:rPr>
               <a:t>تَتَنَاوَلُ</a:t>
@@ -34273,6 +34499,7 @@
                   <a:srgbClr val="1B3B6F"/>
                 </a:solidFill>
                 <a:latin typeface="Amiri" pitchFamily="2" charset="-78"/>
+                <a:ea typeface="Amiri" pitchFamily="2" charset="-78"/>
                 <a:cs typeface="Amiri" pitchFamily="2" charset="-78"/>
               </a:rPr>
               <a:t>يَتَنَاوَلُ</a:t>
@@ -34538,6 +34765,7 @@
                   <a:srgbClr val="1B3B6F"/>
                 </a:solidFill>
                 <a:latin typeface="Amiri" pitchFamily="2" charset="-78"/>
+                <a:ea typeface="Amiri" pitchFamily="2" charset="-78"/>
                 <a:cs typeface="Amiri" pitchFamily="2" charset="-78"/>
               </a:rPr>
               <a:t>أَسْتَقِلُّ الحَافِلَةَ</a:t>
@@ -34695,6 +34923,7 @@
                   <a:srgbClr val="1B3B6F"/>
                 </a:solidFill>
                 <a:latin typeface="Amiri" pitchFamily="2" charset="-78"/>
+                <a:ea typeface="Amiri" pitchFamily="2" charset="-78"/>
                 <a:cs typeface="Amiri" pitchFamily="2" charset="-78"/>
               </a:rPr>
               <a:t>يَسْتَقِلُّونَ</a:t>
@@ -34798,6 +35027,7 @@
                   <a:srgbClr val="1B3B6F"/>
                 </a:solidFill>
                 <a:latin typeface="Amiri" pitchFamily="2" charset="-78"/>
+                <a:ea typeface="Amiri" pitchFamily="2" charset="-78"/>
                 <a:cs typeface="Amiri" pitchFamily="2" charset="-78"/>
               </a:rPr>
               <a:t>تَسْتَقِلُّ</a:t>
@@ -34901,6 +35131,7 @@
                   <a:srgbClr val="1B3B6F"/>
                 </a:solidFill>
                 <a:latin typeface="Amiri" pitchFamily="2" charset="-78"/>
+                <a:ea typeface="Amiri" pitchFamily="2" charset="-78"/>
                 <a:cs typeface="Amiri" pitchFamily="2" charset="-78"/>
               </a:rPr>
               <a:t>يَسْتَقِلُّ</a:t>
@@ -35166,6 +35397,7 @@
                   <a:srgbClr val="1B3B6F"/>
                 </a:solidFill>
                 <a:latin typeface="Amiri" pitchFamily="2" charset="-78"/>
+                <a:ea typeface="Amiri" pitchFamily="2" charset="-78"/>
                 <a:cs typeface="Amiri" pitchFamily="2" charset="-78"/>
               </a:rPr>
               <a:t>أَسْتَعِدُّ</a:t>
@@ -35323,6 +35555,7 @@
                   <a:srgbClr val="1B3B6F"/>
                 </a:solidFill>
                 <a:latin typeface="Amiri" pitchFamily="2" charset="-78"/>
+                <a:ea typeface="Amiri" pitchFamily="2" charset="-78"/>
                 <a:cs typeface="Amiri" pitchFamily="2" charset="-78"/>
               </a:rPr>
               <a:t>يَسْتَعِدُّونَ</a:t>
@@ -35426,6 +35659,7 @@
                   <a:srgbClr val="1B3B6F"/>
                 </a:solidFill>
                 <a:latin typeface="Amiri" pitchFamily="2" charset="-78"/>
+                <a:ea typeface="Amiri" pitchFamily="2" charset="-78"/>
                 <a:cs typeface="Amiri" pitchFamily="2" charset="-78"/>
               </a:rPr>
               <a:t>تَسْتَعِدُّ</a:t>
@@ -35529,6 +35763,7 @@
                   <a:srgbClr val="1B3B6F"/>
                 </a:solidFill>
                 <a:latin typeface="Amiri" pitchFamily="2" charset="-78"/>
+                <a:ea typeface="Amiri" pitchFamily="2" charset="-78"/>
                 <a:cs typeface="Amiri" pitchFamily="2" charset="-78"/>
               </a:rPr>
               <a:t>يَسْتَعِدُّ</a:t>
@@ -35794,6 +36029,7 @@
                   <a:srgbClr val="1B3B6F"/>
                 </a:solidFill>
                 <a:latin typeface="Amiri" pitchFamily="2" charset="-78"/>
+                <a:ea typeface="Amiri" pitchFamily="2" charset="-78"/>
                 <a:cs typeface="Amiri" pitchFamily="2" charset="-78"/>
               </a:rPr>
               <a:t>أَصِلُ</a:t>
@@ -35951,6 +36187,7 @@
                   <a:srgbClr val="1B3B6F"/>
                 </a:solidFill>
                 <a:latin typeface="Amiri" pitchFamily="2" charset="-78"/>
+                <a:ea typeface="Amiri" pitchFamily="2" charset="-78"/>
                 <a:cs typeface="Amiri" pitchFamily="2" charset="-78"/>
               </a:rPr>
               <a:t>يَصِلُونَ</a:t>
@@ -36054,6 +36291,7 @@
                   <a:srgbClr val="1B3B6F"/>
                 </a:solidFill>
                 <a:latin typeface="Amiri" pitchFamily="2" charset="-78"/>
+                <a:ea typeface="Amiri" pitchFamily="2" charset="-78"/>
                 <a:cs typeface="Amiri" pitchFamily="2" charset="-78"/>
               </a:rPr>
               <a:t>تَصِلُ</a:t>
@@ -36157,6 +36395,7 @@
                   <a:srgbClr val="1B3B6F"/>
                 </a:solidFill>
                 <a:latin typeface="Amiri" pitchFamily="2" charset="-78"/>
+                <a:ea typeface="Amiri" pitchFamily="2" charset="-78"/>
                 <a:cs typeface="Amiri" pitchFamily="2" charset="-78"/>
               </a:rPr>
               <a:t>يَصِلُ</a:t>
@@ -36422,6 +36661,7 @@
                   <a:srgbClr val="1B3B6F"/>
                 </a:solidFill>
                 <a:latin typeface="Amiri" pitchFamily="2" charset="-78"/>
+                <a:ea typeface="Amiri" pitchFamily="2" charset="-78"/>
                 <a:cs typeface="Amiri" pitchFamily="2" charset="-78"/>
               </a:rPr>
               <a:t>أَنَامُ</a:t>
@@ -36579,6 +36819,7 @@
                   <a:srgbClr val="1B3B6F"/>
                 </a:solidFill>
                 <a:latin typeface="Amiri" pitchFamily="2" charset="-78"/>
+                <a:ea typeface="Amiri" pitchFamily="2" charset="-78"/>
                 <a:cs typeface="Amiri" pitchFamily="2" charset="-78"/>
               </a:rPr>
               <a:t>يَنَامُونَ</a:t>
@@ -36682,6 +36923,7 @@
                   <a:srgbClr val="1B3B6F"/>
                 </a:solidFill>
                 <a:latin typeface="Amiri" pitchFamily="2" charset="-78"/>
+                <a:ea typeface="Amiri" pitchFamily="2" charset="-78"/>
                 <a:cs typeface="Amiri" pitchFamily="2" charset="-78"/>
               </a:rPr>
               <a:t>تَنَامُ</a:t>
@@ -36785,6 +37027,7 @@
                   <a:srgbClr val="1B3B6F"/>
                 </a:solidFill>
                 <a:latin typeface="Amiri" pitchFamily="2" charset="-78"/>
+                <a:ea typeface="Amiri" pitchFamily="2" charset="-78"/>
                 <a:cs typeface="Amiri" pitchFamily="2" charset="-78"/>
               </a:rPr>
               <a:t>يَنَامُ</a:t>
@@ -36918,6 +37161,7 @@
                   <a:srgbClr val="D4AF37"/>
                 </a:solidFill>
                 <a:latin typeface="Amiri" pitchFamily="2" charset="-78"/>
+                <a:ea typeface="Amiri" pitchFamily="2" charset="-78"/>
                 <a:cs typeface="Amiri" pitchFamily="2" charset="-78"/>
               </a:rPr>
               <a:t>م</a:t>
@@ -37238,6 +37482,7 @@
                   <a:srgbClr val="8A6D1E"/>
                 </a:solidFill>
                 <a:latin typeface="Amiri" pitchFamily="2" charset="-78"/>
+                <a:ea typeface="Amiri" pitchFamily="2" charset="-78"/>
                 <a:cs typeface="Amiri" pitchFamily="2" charset="-78"/>
               </a:rPr>
               <a:t>الصِّفَاتُ وَالوَقْتُ</a:t>
@@ -37541,6 +37786,7 @@
                   <a:srgbClr val="1B3B6F"/>
                 </a:solidFill>
                 <a:latin typeface="Amiri" pitchFamily="2" charset="-78"/>
+                <a:ea typeface="Amiri" pitchFamily="2" charset="-78"/>
                 <a:cs typeface="Amiri" pitchFamily="2" charset="-78"/>
               </a:rPr>
               <a:t>نَشِيطٌ</a:t>
@@ -37698,6 +37944,7 @@
                   <a:srgbClr val="1B3B6F"/>
                 </a:solidFill>
                 <a:latin typeface="Amiri" pitchFamily="2" charset="-78"/>
+                <a:ea typeface="Amiri" pitchFamily="2" charset="-78"/>
                 <a:cs typeface="Amiri" pitchFamily="2" charset="-78"/>
               </a:rPr>
               <a:t>نَشِيطُونَ</a:t>
@@ -37801,6 +38048,7 @@
                   <a:srgbClr val="1B3B6F"/>
                 </a:solidFill>
                 <a:latin typeface="Amiri" pitchFamily="2" charset="-78"/>
+                <a:ea typeface="Amiri" pitchFamily="2" charset="-78"/>
                 <a:cs typeface="Amiri" pitchFamily="2" charset="-78"/>
               </a:rPr>
               <a:t>نَشِيطَةٌ</a:t>
@@ -37904,6 +38152,7 @@
                   <a:srgbClr val="1B3B6F"/>
                 </a:solidFill>
                 <a:latin typeface="Amiri" pitchFamily="2" charset="-78"/>
+                <a:ea typeface="Amiri" pitchFamily="2" charset="-78"/>
                 <a:cs typeface="Amiri" pitchFamily="2" charset="-78"/>
               </a:rPr>
               <a:t>نَشِيطٌ</a:t>
@@ -38169,6 +38418,7 @@
                   <a:srgbClr val="1B3B6F"/>
                 </a:solidFill>
                 <a:latin typeface="Amiri" pitchFamily="2" charset="-78"/>
+                <a:ea typeface="Amiri" pitchFamily="2" charset="-78"/>
                 <a:cs typeface="Amiri" pitchFamily="2" charset="-78"/>
               </a:rPr>
               <a:t>نَاعِسٌ</a:t>
@@ -38326,6 +38576,7 @@
                   <a:srgbClr val="1B3B6F"/>
                 </a:solidFill>
                 <a:latin typeface="Amiri" pitchFamily="2" charset="-78"/>
+                <a:ea typeface="Amiri" pitchFamily="2" charset="-78"/>
                 <a:cs typeface="Amiri" pitchFamily="2" charset="-78"/>
               </a:rPr>
               <a:t>نَاعِسُونَ</a:t>
@@ -38429,6 +38680,7 @@
                   <a:srgbClr val="1B3B6F"/>
                 </a:solidFill>
                 <a:latin typeface="Amiri" pitchFamily="2" charset="-78"/>
+                <a:ea typeface="Amiri" pitchFamily="2" charset="-78"/>
                 <a:cs typeface="Amiri" pitchFamily="2" charset="-78"/>
               </a:rPr>
               <a:t>نَاعِسَةٌ</a:t>
@@ -38532,6 +38784,7 @@
                   <a:srgbClr val="1B3B6F"/>
                 </a:solidFill>
                 <a:latin typeface="Amiri" pitchFamily="2" charset="-78"/>
+                <a:ea typeface="Amiri" pitchFamily="2" charset="-78"/>
                 <a:cs typeface="Amiri" pitchFamily="2" charset="-78"/>
               </a:rPr>
               <a:t>نَاعِسٌ</a:t>
@@ -38797,6 +39050,7 @@
                   <a:srgbClr val="1B3B6F"/>
                 </a:solidFill>
                 <a:latin typeface="Amiri" pitchFamily="2" charset="-78"/>
+                <a:ea typeface="Amiri" pitchFamily="2" charset="-78"/>
                 <a:cs typeface="Amiri" pitchFamily="2" charset="-78"/>
               </a:rPr>
               <a:t>مُتْعَبٌ</a:t>
@@ -38954,6 +39208,7 @@
                   <a:srgbClr val="1B3B6F"/>
                 </a:solidFill>
                 <a:latin typeface="Amiri" pitchFamily="2" charset="-78"/>
+                <a:ea typeface="Amiri" pitchFamily="2" charset="-78"/>
                 <a:cs typeface="Amiri" pitchFamily="2" charset="-78"/>
               </a:rPr>
               <a:t>مُتْعَبُونَ</a:t>
@@ -39057,6 +39312,7 @@
                   <a:srgbClr val="1B3B6F"/>
                 </a:solidFill>
                 <a:latin typeface="Amiri" pitchFamily="2" charset="-78"/>
+                <a:ea typeface="Amiri" pitchFamily="2" charset="-78"/>
                 <a:cs typeface="Amiri" pitchFamily="2" charset="-78"/>
               </a:rPr>
               <a:t>مُتْعَبَةٌ</a:t>
@@ -39160,6 +39416,7 @@
                   <a:srgbClr val="1B3B6F"/>
                 </a:solidFill>
                 <a:latin typeface="Amiri" pitchFamily="2" charset="-78"/>
+                <a:ea typeface="Amiri" pitchFamily="2" charset="-78"/>
                 <a:cs typeface="Amiri" pitchFamily="2" charset="-78"/>
               </a:rPr>
               <a:t>مُتْعَبٌ</a:t>
@@ -39425,6 +39682,7 @@
                   <a:srgbClr val="1B3B6F"/>
                 </a:solidFill>
                 <a:latin typeface="Amiri" pitchFamily="2" charset="-78"/>
+                <a:ea typeface="Amiri" pitchFamily="2" charset="-78"/>
                 <a:cs typeface="Amiri" pitchFamily="2" charset="-78"/>
               </a:rPr>
               <a:t>مُنَبِّهٌ</a:t>
@@ -39582,6 +39840,7 @@
                   <a:srgbClr val="1B3B6F"/>
                 </a:solidFill>
                 <a:latin typeface="Amiri" pitchFamily="2" charset="-78"/>
+                <a:ea typeface="Amiri" pitchFamily="2" charset="-78"/>
                 <a:cs typeface="Amiri" pitchFamily="2" charset="-78"/>
               </a:rPr>
               <a:t>مُنَبِّهَاتٌ</a:t>
@@ -39685,6 +39944,7 @@
                   <a:srgbClr val="1B3B6F"/>
                 </a:solidFill>
                 <a:latin typeface="Amiri" pitchFamily="2" charset="-78"/>
+                <a:ea typeface="Amiri" pitchFamily="2" charset="-78"/>
                 <a:cs typeface="Amiri" pitchFamily="2" charset="-78"/>
               </a:rPr>
               <a:t>مُنَبِّهٌ</a:t>
@@ -39950,6 +40210,7 @@
                   <a:srgbClr val="1B3B6F"/>
                 </a:solidFill>
                 <a:latin typeface="Amiri" pitchFamily="2" charset="-78"/>
+                <a:ea typeface="Amiri" pitchFamily="2" charset="-78"/>
                 <a:cs typeface="Amiri" pitchFamily="2" charset="-78"/>
               </a:rPr>
               <a:t>عَادَةً · أَحْيَانًا</a:t>
@@ -40269,6 +40530,7 @@
                   <a:srgbClr val="1B3B6F"/>
                 </a:solidFill>
                 <a:latin typeface="Amiri" pitchFamily="2" charset="-78"/>
+                <a:ea typeface="Amiri" pitchFamily="2" charset="-78"/>
                 <a:cs typeface="Amiri" pitchFamily="2" charset="-78"/>
               </a:rPr>
               <a:t>مُبَكِّرًا · مُتَأَخِّرًا</a:t>
@@ -40456,6 +40718,7 @@
                   <a:srgbClr val="D4AF37"/>
                 </a:solidFill>
                 <a:latin typeface="Amiri" pitchFamily="2" charset="-78"/>
+                <a:ea typeface="Amiri" pitchFamily="2" charset="-78"/>
                 <a:cs typeface="Amiri" pitchFamily="2" charset="-78"/>
               </a:rPr>
               <a:t>م</a:t>
@@ -40776,6 +41039,7 @@
                   <a:srgbClr val="8A6D1E"/>
                 </a:solidFill>
                 <a:latin typeface="Amiri" pitchFamily="2" charset="-78"/>
+                <a:ea typeface="Amiri" pitchFamily="2" charset="-78"/>
                 <a:cs typeface="Amiri" pitchFamily="2" charset="-78"/>
               </a:rPr>
               <a:t>فِي الغُرَفِ</a:t>
@@ -41952,6 +42216,7 @@
                   <a:srgbClr val="1B3B6F"/>
                 </a:solidFill>
                 <a:latin typeface="Amiri" pitchFamily="2" charset="-78"/>
+                <a:ea typeface="Amiri" pitchFamily="2" charset="-78"/>
                 <a:cs typeface="Amiri" pitchFamily="2" charset="-78"/>
               </a:rPr>
               <a:t>دَوْرُكَ!</a:t>
@@ -42028,6 +42293,7 @@
                   <a:srgbClr val="1B3B6F"/>
                 </a:solidFill>
                 <a:latin typeface="Amiri" pitchFamily="2" charset="-78"/>
+                <a:ea typeface="Amiri" pitchFamily="2" charset="-78"/>
                 <a:cs typeface="Amiri" pitchFamily="2" charset="-78"/>
               </a:rPr>
               <a:t>أَحْسَنْتَ! / أَحْسَنْتِ!</a:t>
@@ -42104,6 +42370,7 @@
                   <a:srgbClr val="1B3B6F"/>
                 </a:solidFill>
                 <a:latin typeface="Amiri" pitchFamily="2" charset="-78"/>
+                <a:ea typeface="Amiri" pitchFamily="2" charset="-78"/>
                 <a:cs typeface="Amiri" pitchFamily="2" charset="-78"/>
               </a:rPr>
               <a:t>تَكَلَّمْ أَكْثَرَ، مِنْ فَضْلِكَ</a:t>
@@ -42180,6 +42447,7 @@
                   <a:srgbClr val="1B3B6F"/>
                 </a:solidFill>
                 <a:latin typeface="Amiri" pitchFamily="2" charset="-78"/>
+                <a:ea typeface="Amiri" pitchFamily="2" charset="-78"/>
                 <a:cs typeface="Amiri" pitchFamily="2" charset="-78"/>
               </a:rPr>
               <a:t>لِمَاذَا؟</a:t>
@@ -42351,6 +42619,7 @@
                   <a:srgbClr val="D4AF37"/>
                 </a:solidFill>
                 <a:latin typeface="Amiri" pitchFamily="2" charset="-78"/>
+                <a:ea typeface="Amiri" pitchFamily="2" charset="-78"/>
                 <a:cs typeface="Amiri" pitchFamily="2" charset="-78"/>
               </a:rPr>
               <a:t>م</a:t>
@@ -42671,6 +42940,7 @@
                   <a:srgbClr val="8A6D1E"/>
                 </a:solidFill>
                 <a:latin typeface="Amiri" pitchFamily="2" charset="-78"/>
+                <a:ea typeface="Amiri" pitchFamily="2" charset="-78"/>
                 <a:cs typeface="Amiri" pitchFamily="2" charset="-78"/>
               </a:rPr>
               <a:t>فِي المُخَيَّمِ الصَّيْفِيِّ</a:t>
@@ -42951,6 +43221,7 @@
                   <a:srgbClr val="1B3B6F"/>
                 </a:solidFill>
                 <a:latin typeface="Amiri" pitchFamily="2" charset="-78"/>
+                <a:ea typeface="Amiri" pitchFamily="2" charset="-78"/>
                 <a:cs typeface="Amiri" pitchFamily="2" charset="-78"/>
               </a:rPr>
               <a:t>اسْمِي … وَعُمْرِي …</a:t>
@@ -43027,6 +43298,7 @@
                   <a:srgbClr val="1B3B6F"/>
                 </a:solidFill>
                 <a:latin typeface="Amiri" pitchFamily="2" charset="-78"/>
+                <a:ea typeface="Amiri" pitchFamily="2" charset="-78"/>
                 <a:cs typeface="Amiri" pitchFamily="2" charset="-78"/>
               </a:rPr>
               <a:t>أَهْلًا وَسَهْلًا! مَا اسْمُكَ، وَكَمْ عُمْرُكَ؟</a:t>
@@ -43195,6 +43467,7 @@
                   <a:srgbClr val="1B3B6F"/>
                 </a:solidFill>
                 <a:latin typeface="Amiri" pitchFamily="2" charset="-78"/>
+                <a:ea typeface="Amiri" pitchFamily="2" charset="-78"/>
                 <a:cs typeface="Amiri" pitchFamily="2" charset="-78"/>
               </a:rPr>
               <a:t>أَسْتَيْقِظُ فِي السَّاعَةِ …</a:t>
@@ -43271,6 +43544,7 @@
                   <a:srgbClr val="1B3B6F"/>
                 </a:solidFill>
                 <a:latin typeface="Amiri" pitchFamily="2" charset="-78"/>
+                <a:ea typeface="Amiri" pitchFamily="2" charset="-78"/>
                 <a:cs typeface="Amiri" pitchFamily="2" charset="-78"/>
               </a:rPr>
               <a:t>فِي أَيِّ سَاعَةٍ تَسْتَيْقِظُ عَادَةً؟</a:t>
@@ -43439,6 +43713,7 @@
                   <a:srgbClr val="1B3B6F"/>
                 </a:solidFill>
                 <a:latin typeface="Amiri" pitchFamily="2" charset="-78"/>
+                <a:ea typeface="Amiri" pitchFamily="2" charset="-78"/>
                 <a:cs typeface="Amiri" pitchFamily="2" charset="-78"/>
               </a:rPr>
               <a:t>أَتَنَاوَلُ … وَأَشْرَبُ …</a:t>
@@ -43515,6 +43790,7 @@
                   <a:srgbClr val="1B3B6F"/>
                 </a:solidFill>
                 <a:latin typeface="Amiri" pitchFamily="2" charset="-78"/>
+                <a:ea typeface="Amiri" pitchFamily="2" charset="-78"/>
                 <a:cs typeface="Amiri" pitchFamily="2" charset="-78"/>
               </a:rPr>
               <a:t>مَاذَا تَتَنَاوَلُ فِي الإِفْطَارِ؟</a:t>
@@ -43683,6 +43959,7 @@
                   <a:srgbClr val="1B3B6F"/>
                 </a:solidFill>
                 <a:latin typeface="Amiri" pitchFamily="2" charset="-78"/>
+                <a:ea typeface="Amiri" pitchFamily="2" charset="-78"/>
                 <a:cs typeface="Amiri" pitchFamily="2" charset="-78"/>
               </a:rPr>
               <a:t>أَسْتَقِلُّ الحَافِلَةَ / أَمْشِي</a:t>
@@ -43759,6 +44036,7 @@
                   <a:srgbClr val="1B3B6F"/>
                 </a:solidFill>
                 <a:latin typeface="Amiri" pitchFamily="2" charset="-78"/>
+                <a:ea typeface="Amiri" pitchFamily="2" charset="-78"/>
                 <a:cs typeface="Amiri" pitchFamily="2" charset="-78"/>
               </a:rPr>
               <a:t>كَيْفَ تَذْهَبُ إِلَى المَدْرَسَةِ؟</a:t>
@@ -43927,6 +44205,7 @@
                   <a:srgbClr val="1B3B6F"/>
                 </a:solidFill>
                 <a:latin typeface="Amiri" pitchFamily="2" charset="-78"/>
+                <a:ea typeface="Amiri" pitchFamily="2" charset="-78"/>
                 <a:cs typeface="Amiri" pitchFamily="2" charset="-78"/>
               </a:rPr>
               <a:t>بَعْدَ المَدْرَسَةِ أَ…</a:t>
@@ -44003,6 +44282,7 @@
                   <a:srgbClr val="1B3B6F"/>
                 </a:solidFill>
                 <a:latin typeface="Amiri" pitchFamily="2" charset="-78"/>
+                <a:ea typeface="Amiri" pitchFamily="2" charset="-78"/>
                 <a:cs typeface="Amiri" pitchFamily="2" charset="-78"/>
               </a:rPr>
               <a:t>وَمَاذَا تَفْعَلُ بَعْدَ المَدْرَسَةِ؟</a:t>
@@ -44277,6 +44557,7 @@
                   <a:srgbClr val="D4AF37"/>
                 </a:solidFill>
                 <a:latin typeface="Amiri" pitchFamily="2" charset="-78"/>
+                <a:ea typeface="Amiri" pitchFamily="2" charset="-78"/>
                 <a:cs typeface="Amiri" pitchFamily="2" charset="-78"/>
               </a:rPr>
               <a:t>م</a:t>
@@ -44597,6 +44878,7 @@
                   <a:srgbClr val="8A6D1E"/>
                 </a:solidFill>
                 <a:latin typeface="Amiri" pitchFamily="2" charset="-78"/>
+                <a:ea typeface="Amiri" pitchFamily="2" charset="-78"/>
                 <a:cs typeface="Amiri" pitchFamily="2" charset="-78"/>
               </a:rPr>
               <a:t>مُكَالَمَةٌ مَعَ الأُسْرَةِ المُضِيفَةِ</a:t>
@@ -44877,6 +45159,7 @@
                   <a:srgbClr val="1B3B6F"/>
                 </a:solidFill>
                 <a:latin typeface="Amiri" pitchFamily="2" charset="-78"/>
+                <a:ea typeface="Amiri" pitchFamily="2" charset="-78"/>
                 <a:cs typeface="Amiri" pitchFamily="2" charset="-78"/>
               </a:rPr>
               <a:t>فِي أَيَّامِ المَدْرَسَةِ أَسْتَيْقِظُ …</a:t>
@@ -44953,6 +45236,7 @@
                   <a:srgbClr val="1B3B6F"/>
                 </a:solidFill>
                 <a:latin typeface="Amiri" pitchFamily="2" charset="-78"/>
+                <a:ea typeface="Amiri" pitchFamily="2" charset="-78"/>
                 <a:cs typeface="Amiri" pitchFamily="2" charset="-78"/>
               </a:rPr>
               <a:t>مَتَى تَسْتَيْقِظُ فِي أَيَّامِ المَدْرَسَةِ؟</a:t>
@@ -45121,6 +45405,7 @@
                   <a:srgbClr val="1B3B6F"/>
                 </a:solidFill>
                 <a:latin typeface="Amiri" pitchFamily="2" charset="-78"/>
+                <a:ea typeface="Amiri" pitchFamily="2" charset="-78"/>
                 <a:cs typeface="Amiri" pitchFamily="2" charset="-78"/>
               </a:rPr>
               <a:t>… مُتَأَخِّرًا لِأَنِّي …</a:t>
@@ -45197,6 +45482,7 @@
                   <a:srgbClr val="1B3B6F"/>
                 </a:solidFill>
                 <a:latin typeface="Amiri" pitchFamily="2" charset="-78"/>
+                <a:ea typeface="Amiri" pitchFamily="2" charset="-78"/>
                 <a:cs typeface="Amiri" pitchFamily="2" charset="-78"/>
               </a:rPr>
               <a:t>وَفِي نِهَايَةِ الأُسْبُوعِ؟</a:t>
@@ -45365,6 +45651,7 @@
                   <a:srgbClr val="1B3B6F"/>
                 </a:solidFill>
                 <a:latin typeface="Amiri" pitchFamily="2" charset="-78"/>
+                <a:ea typeface="Amiri" pitchFamily="2" charset="-78"/>
                 <a:cs typeface="Amiri" pitchFamily="2" charset="-78"/>
               </a:rPr>
               <a:t>أَوَّلًا … ثُمَّ … بَعْدَ ذٰلِكَ …</a:t>
@@ -45441,6 +45728,7 @@
                   <a:srgbClr val="1B3B6F"/>
                 </a:solidFill>
                 <a:latin typeface="Amiri" pitchFamily="2" charset="-78"/>
+                <a:ea typeface="Amiri" pitchFamily="2" charset="-78"/>
                 <a:cs typeface="Amiri" pitchFamily="2" charset="-78"/>
               </a:rPr>
               <a:t>مَاذَا تَفْعَلُ فِي الصَّبَاحِ قَبْلَ المَدْرَسَةِ؟</a:t>
@@ -45544,6 +45832,7 @@
                   <a:srgbClr val="1B3B6F"/>
                 </a:solidFill>
                 <a:latin typeface="Amiri" pitchFamily="2" charset="-78"/>
+                <a:ea typeface="Amiri" pitchFamily="2" charset="-78"/>
                 <a:cs typeface="Amiri" pitchFamily="2" charset="-78"/>
               </a:rPr>
               <a:t>فِي أَيِّ سَاعَةٍ …؟</a:t>
@@ -45620,6 +45909,7 @@
                   <a:srgbClr val="1B3B6F"/>
                 </a:solidFill>
                 <a:latin typeface="Amiri" pitchFamily="2" charset="-78"/>
+                <a:ea typeface="Amiri" pitchFamily="2" charset="-78"/>
                 <a:cs typeface="Amiri" pitchFamily="2" charset="-78"/>
               </a:rPr>
               <a:t>… نَتَنَاوَلُ الإِفْطَارَ فِي السَّابِعَةِ.</a:t>
@@ -45723,6 +46013,7 @@
                   <a:srgbClr val="1B3B6F"/>
                 </a:solidFill>
                 <a:latin typeface="Amiri" pitchFamily="2" charset="-78"/>
+                <a:ea typeface="Amiri" pitchFamily="2" charset="-78"/>
                 <a:cs typeface="Amiri" pitchFamily="2" charset="-78"/>
               </a:rPr>
               <a:t>نَعَمْ، أَحْتَاجُ إِلَى …</a:t>
@@ -45799,6 +46090,7 @@
                   <a:srgbClr val="1B3B6F"/>
                 </a:solidFill>
                 <a:latin typeface="Amiri" pitchFamily="2" charset="-78"/>
+                <a:ea typeface="Amiri" pitchFamily="2" charset="-78"/>
                 <a:cs typeface="Amiri" pitchFamily="2" charset="-78"/>
               </a:rPr>
               <a:t>هَلْ تَحْتَاجُ إِلَى شَيْءٍ فِي الصَّبَاحِ؟</a:t>
@@ -45973,13 +46265,9 @@
     <a:fontScheme name="Office">
       <a:majorFont>
         <a:latin typeface="Calibri Light" panose="020F0302020204030204"/>
-        <a:ea typeface=""/>
-        <a:cs typeface=""/>
-        <a:font script="Jpan" typeface="游ゴシック Light"/>
-        <a:font script="Hang" typeface="맑은 고딕"/>
-        <a:font script="Hans" typeface="等线 Light"/>
-        <a:font script="Hant" typeface="新細明體"/>
-        <a:font script="Arab" typeface="Times New Roman"/>
+        <a:ea typeface="Amiri" pitchFamily="2" charset="-78"/>
+        <a:cs typeface="Amiri" pitchFamily="2" charset="-78"/>
+        <a:font script="Arab" typeface="Amiri"/>
         <a:font script="Hebr" typeface="Times New Roman"/>
         <a:font script="Thai" typeface="Angsana New"/>
         <a:font script="Ethi" typeface="Nyala"/>
@@ -46025,13 +46313,9 @@
       </a:majorFont>
       <a:minorFont>
         <a:latin typeface="Calibri" panose="020F0502020204030204"/>
-        <a:ea typeface=""/>
-        <a:cs typeface=""/>
-        <a:font script="Jpan" typeface="游ゴシック"/>
-        <a:font script="Hang" typeface="맑은 고딕"/>
-        <a:font script="Hans" typeface="等线"/>
-        <a:font script="Hant" typeface="新細明體"/>
-        <a:font script="Arab" typeface="Arial"/>
+        <a:ea typeface="Amiri" pitchFamily="2" charset="-78"/>
+        <a:cs typeface="Amiri" pitchFamily="2" charset="-78"/>
+        <a:font script="Arab" typeface="Amiri"/>
         <a:font script="Hebr" typeface="Arial"/>
         <a:font script="Thai" typeface="Cordia New"/>
         <a:font script="Ethi" typeface="Nyala"/>
